--- a/folien/07-docker-compose.pptx
+++ b/folien/07-docker-compose.pptx
@@ -20,9 +20,10 @@
     <p:sldId id="268" r:id="rId14"/>
     <p:sldId id="269" r:id="rId15"/>
     <p:sldId id="270" r:id="rId16"/>
+    <p:sldId id="271" r:id="rId17"/>
   </p:sldIdLst>
   <p:notesMasterIdLst>
-    <p:notesMasterId r:id="rId17"/>
+    <p:notesMasterId r:id="rId18"/>
   </p:notesMasterIdLst>
   <p:sldSz cx="9144000" cy="5143500"/>
   <p:notesSz cx="5143500" cy="9144000"/>
@@ -1068,6 +1069,94 @@
             <a:fld id="{F7021451-1387-4CA6-816F-3879F97B5CBC}" type="slidenum">
               <a:rPr lang="en-US"/>
               <a:t>15</a:t>
+            </a:fld>
+            <a:endParaRPr lang="en-US"/>
+          </a:p>
+        </p:txBody>
+      </p:sp>
+    </p:spTree>
+    <p:extLst>
+      <p:ext uri="{BB962C8B-B14F-4D97-AF65-F5344CB8AC3E}">
+        <p14:creationId xmlns:p14="http://schemas.microsoft.com/office/powerpoint/2010/main" val="1024086991"/>
+      </p:ext>
+    </p:extLst>
+  </p:cSld>
+  <p:clrMapOvr>
+    <a:masterClrMapping/>
+  </p:clrMapOvr>
+</p:notes>
+</file>
+
+<file path=ppt/notesSlides/notesSlide16.xml><?xml version="1.0" encoding="utf-8"?>
+<p:notes xmlns:a="http://schemas.openxmlformats.org/drawingml/2006/main" xmlns:r="http://schemas.openxmlformats.org/officeDocument/2006/relationships" xmlns:p="http://schemas.openxmlformats.org/presentationml/2006/main">
+  <p:cSld>
+    <p:spTree>
+      <p:nvGrpSpPr>
+        <p:cNvPr id="1" name=""/>
+        <p:cNvGrpSpPr/>
+        <p:nvPr/>
+      </p:nvGrpSpPr>
+      <p:grpSpPr>
+        <a:xfrm>
+          <a:off x="0" y="0"/>
+          <a:ext cx="0" cy="0"/>
+          <a:chOff x="0" y="0"/>
+          <a:chExt cx="0" cy="0"/>
+        </a:xfrm>
+      </p:grpSpPr>
+      <p:sp>
+        <p:nvSpPr>
+          <p:cNvPr id="2" name="Slide Image Placeholder 1"/>
+          <p:cNvSpPr>
+            <a:spLocks noGrp="1" noRot="1" noChangeAspect="1"/>
+          </p:cNvSpPr>
+          <p:nvPr>
+            <p:ph type="sldImg"/>
+          </p:nvPr>
+        </p:nvSpPr>
+        <p:spPr/>
+      </p:sp>
+      <p:sp>
+        <p:nvSpPr>
+          <p:cNvPr id="3" name="Notes Placeholder 2"/>
+          <p:cNvSpPr>
+            <a:spLocks noGrp="1"/>
+          </p:cNvSpPr>
+          <p:nvPr>
+            <p:ph type="body" idx="1"/>
+          </p:nvPr>
+        </p:nvSpPr>
+        <p:spPr/>
+        <p:txBody>
+          <a:bodyPr/>
+          <a:lstStyle/>
+          <a:p>
+            <a:r>
+              <a:rPr lang="en-US" dirty="0"/>
+              <a:t/>
+            </a:r>
+            <a:endParaRPr lang="en-US" dirty="0"/>
+          </a:p>
+        </p:txBody>
+      </p:sp>
+      <p:sp>
+        <p:nvSpPr>
+          <p:cNvPr id="4" name="Slide Number Placeholder 3"/>
+          <p:cNvSpPr>
+            <a:spLocks noGrp="1"/>
+          </p:cNvSpPr>
+          <p:nvPr>
+            <p:ph type="sldNum" sz="quarter" idx="10"/>
+          </p:nvPr>
+        </p:nvSpPr>
+        <p:spPr/>
+        <p:txBody>
+          <a:bodyPr/>
+          <a:lstStyle/>
+          <a:p>
+            <a:fld id="{F7021451-1387-4CA6-816F-3879F97B5CBC}" type="slidenum">
+              <a:rPr lang="en-US"/>
+              <a:t>16</a:t>
             </a:fld>
             <a:endParaRPr lang="en-US"/>
           </a:p>
@@ -2345,8 +2434,28 @@
         </p:nvSpPr>
         <p:spPr>
           <a:xfrm>
-            <a:off x="566928" y="201168"/>
-            <a:ext cx="475488" cy="50292"/>
+            <a:off x="6355080" y="0"/>
+            <a:ext cx="2788920" cy="5143500"/>
+          </a:xfrm>
+          <a:prstGeom prst="rect">
+            <a:avLst/>
+          </a:prstGeom>
+          <a:solidFill>
+            <a:srgbClr val="FBF2E3"/>
+          </a:solidFill>
+          <a:ln/>
+        </p:spPr>
+      </p:sp>
+      <p:sp>
+        <p:nvSpPr>
+          <p:cNvPr id="3" name="Shape 1"/>
+          <p:cNvSpPr/>
+          <p:nvPr/>
+        </p:nvSpPr>
+        <p:spPr>
+          <a:xfrm>
+            <a:off x="6355080" y="0"/>
+            <a:ext cx="45720" cy="5143500"/>
           </a:xfrm>
           <a:prstGeom prst="rect">
             <a:avLst/>
@@ -2359,14 +2468,14 @@
       </p:sp>
       <p:sp>
         <p:nvSpPr>
-          <p:cNvPr id="3" name="Text 1"/>
-          <p:cNvSpPr/>
-          <p:nvPr/>
-        </p:nvSpPr>
-        <p:spPr>
-          <a:xfrm>
-            <a:off x="566928" y="384048"/>
-            <a:ext cx="8010144" cy="237744"/>
+          <p:cNvPr id="4" name="Text 2"/>
+          <p:cNvSpPr/>
+          <p:nvPr/>
+        </p:nvSpPr>
+        <p:spPr>
+          <a:xfrm>
+            <a:off x="6629400" y="1463040"/>
+            <a:ext cx="2194560" cy="1737360"/>
           </a:xfrm>
           <a:prstGeom prst="rect">
             <a:avLst/>
@@ -2378,11 +2487,11 @@
           <a:bodyPr wrap="square" lIns="0" tIns="0" rIns="0" bIns="0" rtlCol="0" anchor="ctr"/>
           <a:lstStyle/>
           <a:p>
-            <a:pPr indent="0" marL="0">
-              <a:buNone/>
-            </a:pPr>
-            <a:r>
-              <a:rPr lang="en-US" sz="1150" b="1" spc="180" kern="0" dirty="0">
+            <a:pPr algn="ctr" indent="0" marL="0">
+              <a:buNone/>
+            </a:pPr>
+            <a:r>
+              <a:rPr lang="en-US" sz="8400" b="1" dirty="0">
                 <a:solidFill>
                   <a:srgbClr val="9A6310"/>
                 </a:solidFill>
@@ -2390,48 +2499,9 @@
                 <a:ea typeface="Arial" pitchFamily="34" charset="-122"/>
                 <a:cs typeface="Arial" pitchFamily="34" charset="-120"/>
               </a:rPr>
-              <a:t>BREAKOUT · 55 MINUTEN</a:t>
-            </a:r>
-            <a:endParaRPr lang="en-US" sz="1150" dirty="0"/>
-          </a:p>
-        </p:txBody>
-      </p:sp>
-      <p:sp>
-        <p:nvSpPr>
-          <p:cNvPr id="4" name="Text 2"/>
-          <p:cNvSpPr/>
-          <p:nvPr/>
-        </p:nvSpPr>
-        <p:spPr>
-          <a:xfrm>
-            <a:off x="566928" y="731520"/>
-            <a:ext cx="8010144" cy="603504"/>
-          </a:xfrm>
-          <a:prstGeom prst="rect">
-            <a:avLst/>
-          </a:prstGeom>
-          <a:noFill/>
-          <a:ln/>
-        </p:spPr>
-        <p:txBody>
-          <a:bodyPr wrap="square" lIns="0" tIns="0" rIns="0" bIns="0" rtlCol="0" anchor="t"/>
-          <a:lstStyle/>
-          <a:p>
-            <a:pPr indent="0" marL="0">
-              <a:buNone/>
-            </a:pPr>
-            <a:r>
-              <a:rPr lang="en-US" sz="2600" b="1" dirty="0">
-                <a:solidFill>
-                  <a:srgbClr val="272E52"/>
-                </a:solidFill>
-                <a:latin typeface="Arial" pitchFamily="34" charset="0"/>
-                <a:ea typeface="Arial" pitchFamily="34" charset="-122"/>
-                <a:cs typeface="Arial" pitchFamily="34" charset="-120"/>
-              </a:rPr>
-              <a:t>Der Auftrag</a:t>
-            </a:r>
-            <a:endParaRPr lang="en-US" sz="2600" dirty="0"/>
+              <a:t>02</a:t>
+            </a:r>
+            <a:endParaRPr lang="en-US" sz="8400" dirty="0"/>
           </a:p>
         </p:txBody>
       </p:sp>
@@ -2443,478 +2513,8 @@
         </p:nvSpPr>
         <p:spPr>
           <a:xfrm>
-            <a:off x="438912" y="1792224"/>
-            <a:ext cx="8266176" cy="329184"/>
-          </a:xfrm>
-          <a:prstGeom prst="rect">
-            <a:avLst/>
-          </a:prstGeom>
-          <a:solidFill>
-            <a:srgbClr val="F5F6FC"/>
-          </a:solidFill>
-          <a:ln/>
-        </p:spPr>
-      </p:sp>
-      <p:sp>
-        <p:nvSpPr>
-          <p:cNvPr id="6" name="Text 4"/>
-          <p:cNvSpPr/>
-          <p:nvPr/>
-        </p:nvSpPr>
-        <p:spPr>
-          <a:xfrm>
-            <a:off x="566928" y="1792224"/>
-            <a:ext cx="914400" cy="329184"/>
-          </a:xfrm>
-          <a:prstGeom prst="rect">
-            <a:avLst/>
-          </a:prstGeom>
-          <a:noFill/>
-          <a:ln/>
-        </p:spPr>
-        <p:txBody>
-          <a:bodyPr wrap="square" lIns="0" tIns="0" rIns="0" bIns="0" rtlCol="0" anchor="ctr"/>
-          <a:lstStyle/>
-          <a:p>
-            <a:pPr indent="0" marL="0">
-              <a:buNone/>
-            </a:pPr>
-            <a:r>
-              <a:rPr lang="en-US" sz="1100" b="1" dirty="0">
-                <a:solidFill>
-                  <a:srgbClr val="9A6310"/>
-                </a:solidFill>
-                <a:latin typeface="Courier New" pitchFamily="34" charset="0"/>
-                <a:ea typeface="Courier New" pitchFamily="34" charset="-122"/>
-                <a:cs typeface="Courier New" pitchFamily="34" charset="-120"/>
-              </a:rPr>
-              <a:t>Teil 1</a:t>
-            </a:r>
-            <a:endParaRPr lang="en-US" sz="1100" dirty="0"/>
-          </a:p>
-        </p:txBody>
-      </p:sp>
-      <p:sp>
-        <p:nvSpPr>
-          <p:cNvPr id="7" name="Text 5"/>
-          <p:cNvSpPr/>
-          <p:nvPr/>
-        </p:nvSpPr>
-        <p:spPr>
-          <a:xfrm>
-            <a:off x="1481328" y="1792224"/>
-            <a:ext cx="7095744" cy="329184"/>
-          </a:xfrm>
-          <a:prstGeom prst="rect">
-            <a:avLst/>
-          </a:prstGeom>
-          <a:noFill/>
-          <a:ln/>
-        </p:spPr>
-        <p:txBody>
-          <a:bodyPr wrap="square" lIns="0" tIns="0" rIns="0" bIns="0" rtlCol="0" anchor="ctr"/>
-          <a:lstStyle/>
-          <a:p>
-            <a:pPr indent="0" marL="0">
-              <a:buNone/>
-            </a:pPr>
-            <a:r>
-              <a:rPr lang="en-US" sz="1100" dirty="0">
-                <a:solidFill>
-                  <a:srgbClr val="434A63"/>
-                </a:solidFill>
-                <a:latin typeface="Arial" pitchFamily="34" charset="0"/>
-                <a:ea typeface="Arial" pitchFamily="34" charset="-122"/>
-                <a:cs typeface="Arial" pitchFamily="34" charset="-120"/>
-              </a:rPr>
-              <a:t>compose.yaml schreiben: zwei Services, ein Volume</a:t>
-            </a:r>
-            <a:endParaRPr lang="en-US" sz="1100" dirty="0"/>
-          </a:p>
-        </p:txBody>
-      </p:sp>
-      <p:sp>
-        <p:nvSpPr>
-          <p:cNvPr id="8" name="Text 6"/>
-          <p:cNvSpPr/>
-          <p:nvPr/>
-        </p:nvSpPr>
-        <p:spPr>
-          <a:xfrm>
-            <a:off x="566928" y="2121408"/>
-            <a:ext cx="914400" cy="329184"/>
-          </a:xfrm>
-          <a:prstGeom prst="rect">
-            <a:avLst/>
-          </a:prstGeom>
-          <a:noFill/>
-          <a:ln/>
-        </p:spPr>
-        <p:txBody>
-          <a:bodyPr wrap="square" lIns="0" tIns="0" rIns="0" bIns="0" rtlCol="0" anchor="ctr"/>
-          <a:lstStyle/>
-          <a:p>
-            <a:pPr indent="0" marL="0">
-              <a:buNone/>
-            </a:pPr>
-            <a:r>
-              <a:rPr lang="en-US" sz="1100" b="1" dirty="0">
-                <a:solidFill>
-                  <a:srgbClr val="9A6310"/>
-                </a:solidFill>
-                <a:latin typeface="Courier New" pitchFamily="34" charset="0"/>
-                <a:ea typeface="Courier New" pitchFamily="34" charset="-122"/>
-                <a:cs typeface="Courier New" pitchFamily="34" charset="-120"/>
-              </a:rPr>
-              <a:t>Teil 2</a:t>
-            </a:r>
-            <a:endParaRPr lang="en-US" sz="1100" dirty="0"/>
-          </a:p>
-        </p:txBody>
-      </p:sp>
-      <p:sp>
-        <p:nvSpPr>
-          <p:cNvPr id="9" name="Text 7"/>
-          <p:cNvSpPr/>
-          <p:nvPr/>
-        </p:nvSpPr>
-        <p:spPr>
-          <a:xfrm>
-            <a:off x="1481328" y="2121408"/>
-            <a:ext cx="7095744" cy="329184"/>
-          </a:xfrm>
-          <a:prstGeom prst="rect">
-            <a:avLst/>
-          </a:prstGeom>
-          <a:noFill/>
-          <a:ln/>
-        </p:spPr>
-        <p:txBody>
-          <a:bodyPr wrap="square" lIns="0" tIns="0" rIns="0" bIns="0" rtlCol="0" anchor="ctr"/>
-          <a:lstStyle/>
-          <a:p>
-            <a:pPr indent="0" marL="0">
-              <a:buNone/>
-            </a:pPr>
-            <a:r>
-              <a:rPr lang="en-US" sz="1100" dirty="0">
-                <a:solidFill>
-                  <a:srgbClr val="434A63"/>
-                </a:solidFill>
-                <a:latin typeface="Arial" pitchFamily="34" charset="0"/>
-                <a:ea typeface="Arial" pitchFamily="34" charset="-122"/>
-                <a:cs typeface="Arial" pitchFamily="34" charset="-120"/>
-              </a:rPr>
-              <a:t>Stack starten, im Browser anmelden, Tabelle anlegen</a:t>
-            </a:r>
-            <a:endParaRPr lang="en-US" sz="1100" dirty="0"/>
-          </a:p>
-        </p:txBody>
-      </p:sp>
-      <p:sp>
-        <p:nvSpPr>
-          <p:cNvPr id="10" name="Shape 8"/>
-          <p:cNvSpPr/>
-          <p:nvPr/>
-        </p:nvSpPr>
-        <p:spPr>
-          <a:xfrm>
-            <a:off x="438912" y="2450592"/>
-            <a:ext cx="8266176" cy="329184"/>
-          </a:xfrm>
-          <a:prstGeom prst="rect">
-            <a:avLst/>
-          </a:prstGeom>
-          <a:solidFill>
-            <a:srgbClr val="F5F6FC"/>
-          </a:solidFill>
-          <a:ln/>
-        </p:spPr>
-      </p:sp>
-      <p:sp>
-        <p:nvSpPr>
-          <p:cNvPr id="11" name="Text 9"/>
-          <p:cNvSpPr/>
-          <p:nvPr/>
-        </p:nvSpPr>
-        <p:spPr>
-          <a:xfrm>
-            <a:off x="566928" y="2450592"/>
-            <a:ext cx="914400" cy="329184"/>
-          </a:xfrm>
-          <a:prstGeom prst="rect">
-            <a:avLst/>
-          </a:prstGeom>
-          <a:noFill/>
-          <a:ln/>
-        </p:spPr>
-        <p:txBody>
-          <a:bodyPr wrap="square" lIns="0" tIns="0" rIns="0" bIns="0" rtlCol="0" anchor="ctr"/>
-          <a:lstStyle/>
-          <a:p>
-            <a:pPr indent="0" marL="0">
-              <a:buNone/>
-            </a:pPr>
-            <a:r>
-              <a:rPr lang="en-US" sz="1100" b="1" dirty="0">
-                <a:solidFill>
-                  <a:srgbClr val="9A6310"/>
-                </a:solidFill>
-                <a:latin typeface="Courier New" pitchFamily="34" charset="0"/>
-                <a:ea typeface="Courier New" pitchFamily="34" charset="-122"/>
-                <a:cs typeface="Courier New" pitchFamily="34" charset="-120"/>
-              </a:rPr>
-              <a:t>Teil 3</a:t>
-            </a:r>
-            <a:endParaRPr lang="en-US" sz="1100" dirty="0"/>
-          </a:p>
-        </p:txBody>
-      </p:sp>
-      <p:sp>
-        <p:nvSpPr>
-          <p:cNvPr id="12" name="Text 10"/>
-          <p:cNvSpPr/>
-          <p:nvPr/>
-        </p:nvSpPr>
-        <p:spPr>
-          <a:xfrm>
-            <a:off x="1481328" y="2450592"/>
-            <a:ext cx="7095744" cy="329184"/>
-          </a:xfrm>
-          <a:prstGeom prst="rect">
-            <a:avLst/>
-          </a:prstGeom>
-          <a:noFill/>
-          <a:ln/>
-        </p:spPr>
-        <p:txBody>
-          <a:bodyPr wrap="square" lIns="0" tIns="0" rIns="0" bIns="0" rtlCol="0" anchor="ctr"/>
-          <a:lstStyle/>
-          <a:p>
-            <a:pPr indent="0" marL="0">
-              <a:buNone/>
-            </a:pPr>
-            <a:r>
-              <a:rPr lang="en-US" sz="1100" dirty="0">
-                <a:solidFill>
-                  <a:srgbClr val="434A63"/>
-                </a:solidFill>
-                <a:latin typeface="Arial" pitchFamily="34" charset="0"/>
-                <a:ea typeface="Arial" pitchFamily="34" charset="-122"/>
-                <a:cs typeface="Arial" pitchFamily="34" charset="-120"/>
-              </a:rPr>
-              <a:t>Härtetest die Zweite: down, up, sind die Daten noch da?</a:t>
-            </a:r>
-            <a:endParaRPr lang="en-US" sz="1100" dirty="0"/>
-          </a:p>
-        </p:txBody>
-      </p:sp>
-      <p:sp>
-        <p:nvSpPr>
-          <p:cNvPr id="13" name="Text 11"/>
-          <p:cNvSpPr/>
-          <p:nvPr/>
-        </p:nvSpPr>
-        <p:spPr>
-          <a:xfrm>
-            <a:off x="566928" y="2779776"/>
-            <a:ext cx="914400" cy="329184"/>
-          </a:xfrm>
-          <a:prstGeom prst="rect">
-            <a:avLst/>
-          </a:prstGeom>
-          <a:noFill/>
-          <a:ln/>
-        </p:spPr>
-        <p:txBody>
-          <a:bodyPr wrap="square" lIns="0" tIns="0" rIns="0" bIns="0" rtlCol="0" anchor="ctr"/>
-          <a:lstStyle/>
-          <a:p>
-            <a:pPr indent="0" marL="0">
-              <a:buNone/>
-            </a:pPr>
-            <a:r>
-              <a:rPr lang="en-US" sz="1100" b="1" dirty="0">
-                <a:solidFill>
-                  <a:srgbClr val="9A6310"/>
-                </a:solidFill>
-                <a:latin typeface="Courier New" pitchFamily="34" charset="0"/>
-                <a:ea typeface="Courier New" pitchFamily="34" charset="-122"/>
-                <a:cs typeface="Courier New" pitchFamily="34" charset="-120"/>
-              </a:rPr>
-              <a:t>Bonus</a:t>
-            </a:r>
-            <a:endParaRPr lang="en-US" sz="1100" dirty="0"/>
-          </a:p>
-        </p:txBody>
-      </p:sp>
-      <p:sp>
-        <p:nvSpPr>
-          <p:cNvPr id="14" name="Text 12"/>
-          <p:cNvSpPr/>
-          <p:nvPr/>
-        </p:nvSpPr>
-        <p:spPr>
-          <a:xfrm>
-            <a:off x="1481328" y="2779776"/>
-            <a:ext cx="7095744" cy="329184"/>
-          </a:xfrm>
-          <a:prstGeom prst="rect">
-            <a:avLst/>
-          </a:prstGeom>
-          <a:noFill/>
-          <a:ln/>
-        </p:spPr>
-        <p:txBody>
-          <a:bodyPr wrap="square" lIns="0" tIns="0" rIns="0" bIns="0" rtlCol="0" anchor="ctr"/>
-          <a:lstStyle/>
-          <a:p>
-            <a:pPr indent="0" marL="0">
-              <a:buNone/>
-            </a:pPr>
-            <a:r>
-              <a:rPr lang="en-US" sz="1100" dirty="0">
-                <a:solidFill>
-                  <a:srgbClr val="434A63"/>
-                </a:solidFill>
-                <a:latin typeface="Arial" pitchFamily="34" charset="0"/>
-                <a:ea typeface="Arial" pitchFamily="34" charset="-122"/>
-                <a:cs typeface="Arial" pitchFamily="34" charset="-120"/>
-              </a:rPr>
-              <a:t>Drei Experimente: zweiter Adminer im Stack, Logs verfolgen, config</a:t>
-            </a:r>
-            <a:endParaRPr lang="en-US" sz="1100" dirty="0"/>
-          </a:p>
-        </p:txBody>
-      </p:sp>
-      <p:sp>
-        <p:nvSpPr>
-          <p:cNvPr id="15" name="Shape 13"/>
-          <p:cNvSpPr/>
-          <p:nvPr/>
-        </p:nvSpPr>
-        <p:spPr>
-          <a:xfrm>
-            <a:off x="438912" y="3108960"/>
-            <a:ext cx="8266176" cy="329184"/>
-          </a:xfrm>
-          <a:prstGeom prst="rect">
-            <a:avLst/>
-          </a:prstGeom>
-          <a:solidFill>
-            <a:srgbClr val="F5F6FC"/>
-          </a:solidFill>
-          <a:ln/>
-        </p:spPr>
-      </p:sp>
-      <p:sp>
-        <p:nvSpPr>
-          <p:cNvPr id="16" name="Text 14"/>
-          <p:cNvSpPr/>
-          <p:nvPr/>
-        </p:nvSpPr>
-        <p:spPr>
-          <a:xfrm>
-            <a:off x="566928" y="3108960"/>
-            <a:ext cx="914400" cy="329184"/>
-          </a:xfrm>
-          <a:prstGeom prst="rect">
-            <a:avLst/>
-          </a:prstGeom>
-          <a:noFill/>
-          <a:ln/>
-        </p:spPr>
-        <p:txBody>
-          <a:bodyPr wrap="square" lIns="0" tIns="0" rIns="0" bIns="0" rtlCol="0" anchor="ctr"/>
-          <a:lstStyle/>
-          <a:p>
-            <a:pPr indent="0" marL="0">
-              <a:buNone/>
-            </a:pPr>
-            <a:r>
-              <a:rPr lang="en-US" sz="1100" b="1" dirty="0">
-                <a:solidFill>
-                  <a:srgbClr val="9A6310"/>
-                </a:solidFill>
-                <a:latin typeface="Courier New" pitchFamily="34" charset="0"/>
-                <a:ea typeface="Courier New" pitchFamily="34" charset="-122"/>
-                <a:cs typeface="Courier New" pitchFamily="34" charset="-120"/>
-              </a:rPr>
-              <a:t>Notieren</a:t>
-            </a:r>
-            <a:endParaRPr lang="en-US" sz="1100" dirty="0"/>
-          </a:p>
-        </p:txBody>
-      </p:sp>
-      <p:sp>
-        <p:nvSpPr>
-          <p:cNvPr id="17" name="Text 15"/>
-          <p:cNvSpPr/>
-          <p:nvPr/>
-        </p:nvSpPr>
-        <p:spPr>
-          <a:xfrm>
-            <a:off x="1481328" y="3108960"/>
-            <a:ext cx="7095744" cy="329184"/>
-          </a:xfrm>
-          <a:prstGeom prst="rect">
-            <a:avLst/>
-          </a:prstGeom>
-          <a:noFill/>
-          <a:ln/>
-        </p:spPr>
-        <p:txBody>
-          <a:bodyPr wrap="square" lIns="0" tIns="0" rIns="0" bIns="0" rtlCol="0" anchor="ctr"/>
-          <a:lstStyle/>
-          <a:p>
-            <a:pPr indent="0" marL="0">
-              <a:buNone/>
-            </a:pPr>
-            <a:r>
-              <a:rPr lang="en-US" sz="1100" dirty="0">
-                <a:solidFill>
-                  <a:srgbClr val="434A63"/>
-                </a:solidFill>
-                <a:latin typeface="Arial" pitchFamily="34" charset="0"/>
-                <a:ea typeface="Arial" pitchFamily="34" charset="-122"/>
-                <a:cs typeface="Arial" pitchFamily="34" charset="-120"/>
-              </a:rPr>
-              <a:t>Eure Antwort: Was löscht down und was löscht erst down -v?</a:t>
-            </a:r>
-            <a:endParaRPr lang="en-US" sz="1100" dirty="0"/>
-          </a:p>
-        </p:txBody>
-      </p:sp>
-      <p:sp>
-        <p:nvSpPr>
-          <p:cNvPr id="18" name="Shape 16"/>
-          <p:cNvSpPr/>
-          <p:nvPr/>
-        </p:nvSpPr>
-        <p:spPr>
-          <a:xfrm>
-            <a:off x="566928" y="3456432"/>
-            <a:ext cx="8010144" cy="1097280"/>
-          </a:xfrm>
-          <a:prstGeom prst="rect">
-            <a:avLst/>
-          </a:prstGeom>
-          <a:solidFill>
-            <a:srgbClr val="EEF0FB"/>
-          </a:solidFill>
-          <a:ln/>
-        </p:spPr>
-      </p:sp>
-      <p:sp>
-        <p:nvSpPr>
-          <p:cNvPr id="19" name="Shape 17"/>
-          <p:cNvSpPr/>
-          <p:nvPr/>
-        </p:nvSpPr>
-        <p:spPr>
-          <a:xfrm>
-            <a:off x="566928" y="3456432"/>
-            <a:ext cx="41148" cy="1097280"/>
+            <a:off x="566928" y="1883664"/>
+            <a:ext cx="475488" cy="50292"/>
           </a:xfrm>
           <a:prstGeom prst="rect">
             <a:avLst/>
@@ -2927,14 +2527,14 @@
       </p:sp>
       <p:sp>
         <p:nvSpPr>
-          <p:cNvPr id="20" name="Text 18"/>
-          <p:cNvSpPr/>
-          <p:nvPr/>
-        </p:nvSpPr>
-        <p:spPr>
-          <a:xfrm>
-            <a:off x="804672" y="3602736"/>
-            <a:ext cx="7607808" cy="242062"/>
+          <p:cNvPr id="6" name="Text 4"/>
+          <p:cNvSpPr/>
+          <p:nvPr/>
+        </p:nvSpPr>
+        <p:spPr>
+          <a:xfrm>
+            <a:off x="566928" y="2084832"/>
+            <a:ext cx="5394960" cy="868680"/>
           </a:xfrm>
           <a:prstGeom prst="rect">
             <a:avLst/>
@@ -2950,7 +2550,7 @@
               <a:buNone/>
             </a:pPr>
             <a:r>
-              <a:rPr lang="en-US" sz="1300" b="1" dirty="0">
+              <a:rPr lang="en-US" sz="3000" b="1" dirty="0">
                 <a:solidFill>
                   <a:srgbClr val="272E52"/>
                 </a:solidFill>
@@ -2958,22 +2558,22 @@
                 <a:ea typeface="Arial" pitchFamily="34" charset="-122"/>
                 <a:cs typeface="Arial" pitchFamily="34" charset="-120"/>
               </a:rPr>
-              <a:t>Jetzt öffnen, alles braucht ihr gleich im Raum</a:t>
-            </a:r>
-            <a:endParaRPr lang="en-US" sz="1300" dirty="0"/>
-          </a:p>
-        </p:txBody>
-      </p:sp>
-      <p:sp>
-        <p:nvSpPr>
-          <p:cNvPr id="21" name="Text 19"/>
-          <p:cNvSpPr/>
-          <p:nvPr/>
-        </p:nvSpPr>
-        <p:spPr>
-          <a:xfrm>
-            <a:off x="804672" y="3890518"/>
-            <a:ext cx="7607808" cy="544322"/>
+              <a:t>Der Stack aus einer Hand</a:t>
+            </a:r>
+            <a:endParaRPr lang="en-US" sz="3000" dirty="0"/>
+          </a:p>
+        </p:txBody>
+      </p:sp>
+      <p:sp>
+        <p:nvSpPr>
+          <p:cNvPr id="7" name="Text 5"/>
+          <p:cNvSpPr/>
+          <p:nvPr/>
+        </p:nvSpPr>
+        <p:spPr>
+          <a:xfrm>
+            <a:off x="566928" y="3017520"/>
+            <a:ext cx="5394960" cy="548640"/>
           </a:xfrm>
           <a:prstGeom prst="rect">
             <a:avLst/>
@@ -2986,124 +2586,10 @@
           <a:lstStyle/>
           <a:p>
             <a:pPr indent="0" marL="0">
-              <a:lnSpc>
-                <a:spcPct val="92000"/>
-              </a:lnSpc>
-              <a:spcAft>
-                <a:spcPts val="500"/>
-              </a:spcAft>
-              <a:buNone/>
-            </a:pPr>
-            <a:r>
-              <a:rPr lang="en-US" sz="1000" dirty="0">
-                <a:solidFill>
-                  <a:srgbClr val="434A63"/>
-                </a:solidFill>
-                <a:latin typeface="Arial" pitchFamily="34" charset="0"/>
-                <a:ea typeface="Arial" pitchFamily="34" charset="-122"/>
-                <a:cs typeface="Arial" pitchFamily="34" charset="-120"/>
-              </a:rPr>
-              <a:t>Übung:  jacobmenge.github.io/kurs-unterlagen/docker-compose/praxis-webapp/</a:t>
-            </a:r>
-            <a:endParaRPr lang="en-US" sz="1000" dirty="0"/>
-          </a:p>
-          <a:p>
-            <a:pPr indent="0" marL="0">
-              <a:lnSpc>
-                <a:spcPct val="92000"/>
-              </a:lnSpc>
-              <a:spcAft>
-                <a:spcPts val="500"/>
-              </a:spcAft>
-              <a:buNone/>
-            </a:pPr>
-            <a:r>
-              <a:rPr lang="en-US" sz="1000" dirty="0">
-                <a:solidFill>
-                  <a:srgbClr val="434A63"/>
-                </a:solidFill>
-                <a:latin typeface="Arial" pitchFamily="34" charset="0"/>
-                <a:ea typeface="Arial" pitchFamily="34" charset="-122"/>
-                <a:cs typeface="Arial" pitchFamily="34" charset="-120"/>
-              </a:rPr>
-              <a:t>Wenn es klemmt:  jacobmenge.github.io/kurs-unterlagen/docker-compose/stolpersteine/</a:t>
-            </a:r>
-            <a:endParaRPr lang="en-US" sz="1000" dirty="0"/>
-          </a:p>
-          <a:p>
-            <a:pPr indent="0" marL="0">
-              <a:lnSpc>
-                <a:spcPct val="92000"/>
-              </a:lnSpc>
-              <a:spcAft>
-                <a:spcPts val="500"/>
-              </a:spcAft>
-              <a:buNone/>
-            </a:pPr>
-            <a:r>
-              <a:rPr lang="en-US" sz="1000" dirty="0">
-                <a:solidFill>
-                  <a:srgbClr val="434A63"/>
-                </a:solidFill>
-                <a:latin typeface="Arial" pitchFamily="34" charset="0"/>
-                <a:ea typeface="Arial" pitchFamily="34" charset="-122"/>
-                <a:cs typeface="Arial" pitchFamily="34" charset="-120"/>
-              </a:rPr>
-              <a:t>Ergebnisse eintragen:  &lt;Link zum Ergebnis-Dokument hier eintragen&gt;</a:t>
-            </a:r>
-            <a:endParaRPr lang="en-US" sz="1000" dirty="0"/>
-          </a:p>
-        </p:txBody>
-      </p:sp>
-      <p:sp>
-        <p:nvSpPr>
-          <p:cNvPr id="22" name="Shape 20"/>
-          <p:cNvSpPr/>
-          <p:nvPr/>
-        </p:nvSpPr>
-        <p:spPr>
-          <a:xfrm>
-            <a:off x="566928" y="4631436"/>
-            <a:ext cx="8010144" cy="0"/>
-          </a:xfrm>
-          <a:prstGeom prst="line">
-            <a:avLst/>
-          </a:prstGeom>
-          <a:noFill/>
-          <a:ln w="9525">
-            <a:solidFill>
-              <a:srgbClr val="DFE3F0"/>
-            </a:solidFill>
-            <a:prstDash val="solid"/>
-          </a:ln>
-        </p:spPr>
-      </p:sp>
-      <p:sp>
-        <p:nvSpPr>
-          <p:cNvPr id="23" name="Text 21"/>
-          <p:cNvSpPr/>
-          <p:nvPr/>
-        </p:nvSpPr>
-        <p:spPr>
-          <a:xfrm>
-            <a:off x="566928" y="4722876"/>
-            <a:ext cx="5029200" cy="237744"/>
-          </a:xfrm>
-          <a:prstGeom prst="rect">
-            <a:avLst/>
-          </a:prstGeom>
-          <a:noFill/>
-          <a:ln/>
-        </p:spPr>
-        <p:txBody>
-          <a:bodyPr wrap="square" lIns="0" tIns="0" rIns="0" bIns="0" rtlCol="0" anchor="ctr"/>
-          <a:lstStyle/>
-          <a:p>
-            <a:pPr indent="0" marL="0">
-              <a:buNone/>
-            </a:pPr>
-            <a:r>
-              <a:rPr lang="en-US" sz="1050" spc="30" kern="0" dirty="0">
+              <a:buNone/>
+            </a:pPr>
+            <a:r>
+              <a:rPr lang="en-US" sz="1350" dirty="0">
                 <a:solidFill>
                   <a:srgbClr val="5C6377"/>
                 </a:solidFill>
@@ -3111,48 +2597,9 @@
                 <a:ea typeface="Arial" pitchFamily="34" charset="-122"/>
                 <a:cs typeface="Arial" pitchFamily="34" charset="-120"/>
               </a:rPr>
-              <a:t>Breakout</a:t>
-            </a:r>
-            <a:endParaRPr lang="en-US" sz="1050" dirty="0"/>
-          </a:p>
-        </p:txBody>
-      </p:sp>
-      <p:sp>
-        <p:nvSpPr>
-          <p:cNvPr id="24" name="Text 22"/>
-          <p:cNvSpPr/>
-          <p:nvPr/>
-        </p:nvSpPr>
-        <p:spPr>
-          <a:xfrm>
-            <a:off x="8028432" y="4722876"/>
-            <a:ext cx="548640" cy="237744"/>
-          </a:xfrm>
-          <a:prstGeom prst="rect">
-            <a:avLst/>
-          </a:prstGeom>
-          <a:noFill/>
-          <a:ln/>
-        </p:spPr>
-        <p:txBody>
-          <a:bodyPr wrap="square" lIns="0" tIns="0" rIns="0" bIns="0" rtlCol="0" anchor="ctr"/>
-          <a:lstStyle/>
-          <a:p>
-            <a:pPr algn="r" indent="0" marL="0">
-              <a:buNone/>
-            </a:pPr>
-            <a:r>
-              <a:rPr lang="en-US" sz="1050" dirty="0">
-                <a:solidFill>
-                  <a:srgbClr val="5C6377"/>
-                </a:solidFill>
-                <a:latin typeface="Arial" pitchFamily="34" charset="0"/>
-                <a:ea typeface="Arial" pitchFamily="34" charset="-122"/>
-                <a:cs typeface="Arial" pitchFamily="34" charset="-120"/>
-              </a:rPr>
-              <a:t>7/11</a:t>
-            </a:r>
-            <a:endParaRPr lang="en-US" sz="1050" dirty="0"/>
+              <a:t>55 Minuten in Gruppen: die Montags-Übung als compose.yaml</a:t>
+            </a:r>
+            <a:endParaRPr lang="en-US" sz="1350" dirty="0"/>
           </a:p>
         </p:txBody>
       </p:sp>
@@ -3241,7 +2688,7 @@
                 <a:ea typeface="Arial" pitchFamily="34" charset="-122"/>
                 <a:cs typeface="Arial" pitchFamily="34" charset="-120"/>
               </a:rPr>
-              <a:t>SPIELREGELN</a:t>
+              <a:t>BREAKOUT · 55 MINUTEN</a:t>
             </a:r>
             <a:endParaRPr lang="en-US" sz="1150" dirty="0"/>
           </a:p>
@@ -3280,7 +2727,7 @@
                 <a:ea typeface="Arial" pitchFamily="34" charset="-122"/>
                 <a:cs typeface="Arial" pitchFamily="34" charset="-120"/>
               </a:rPr>
-              <a:t>So arbeitet ihr</a:t>
+              <a:t>Der Auftrag</a:t>
             </a:r>
             <a:endParaRPr lang="en-US" sz="2600" dirty="0"/>
           </a:p>
@@ -3288,171 +2735,14 @@
       </p:sp>
       <p:sp>
         <p:nvSpPr>
-          <p:cNvPr id="5" name="Text 3"/>
-          <p:cNvSpPr/>
-          <p:nvPr/>
-        </p:nvSpPr>
-        <p:spPr>
-          <a:xfrm>
-            <a:off x="566928" y="1700784"/>
-            <a:ext cx="8010144" cy="1828800"/>
-          </a:xfrm>
-          <a:prstGeom prst="rect">
-            <a:avLst/>
-          </a:prstGeom>
-          <a:noFill/>
-          <a:ln/>
-        </p:spPr>
-        <p:txBody>
-          <a:bodyPr wrap="square" lIns="0" tIns="0" rIns="0" bIns="0" rtlCol="0" anchor="t"/>
-          <a:lstStyle/>
-          <a:p>
-            <a:pPr marL="254000" indent="-254000">
-              <a:lnSpc>
-                <a:spcPct val="100000"/>
-              </a:lnSpc>
-              <a:spcAft>
-                <a:spcPts val="900"/>
-              </a:spcAft>
-              <a:buClr>
-                <a:srgbClr val="0F7C86"/>
-              </a:buClr>
-              <a:buSzPct val="100000"/>
-              <a:buChar char="▸"/>
-            </a:pPr>
-            <a:r>
-              <a:rPr lang="en-US" sz="1250" dirty="0">
-                <a:solidFill>
-                  <a:srgbClr val="434A63"/>
-                </a:solidFill>
-                <a:latin typeface="Arial" pitchFamily="34" charset="0"/>
-                <a:ea typeface="Arial" pitchFamily="34" charset="-122"/>
-                <a:cs typeface="Arial" pitchFamily="34" charset="-120"/>
-              </a:rPr>
-              <a:t>Gleiche Gruppen, eine Person teilt den Bildschirm, alle tippen selbst mit.</a:t>
-            </a:r>
-            <a:endParaRPr lang="en-US" sz="1250" dirty="0"/>
-          </a:p>
-          <a:p>
-            <a:pPr marL="254000" indent="-254000">
-              <a:lnSpc>
-                <a:spcPct val="100000"/>
-              </a:lnSpc>
-              <a:spcAft>
-                <a:spcPts val="900"/>
-              </a:spcAft>
-              <a:buClr>
-                <a:srgbClr val="0F7C86"/>
-              </a:buClr>
-              <a:buSzPct val="100000"/>
-              <a:buChar char="▸"/>
-            </a:pPr>
-            <a:r>
-              <a:rPr lang="en-US" sz="1250" dirty="0">
-                <a:solidFill>
-                  <a:srgbClr val="434A63"/>
-                </a:solidFill>
-                <a:latin typeface="Arial" pitchFamily="34" charset="0"/>
-                <a:ea typeface="Arial" pitchFamily="34" charset="-122"/>
-                <a:cs typeface="Arial" pitchFamily="34" charset="-120"/>
-              </a:rPr>
-              <a:t>Die YAML-Datei tippt ihr ab, statt sie zu kopieren. Die Einrückung ist der halbe Lernstoff.</a:t>
-            </a:r>
-            <a:endParaRPr lang="en-US" sz="1250" dirty="0"/>
-          </a:p>
-          <a:p>
-            <a:pPr marL="254000" indent="-254000">
-              <a:lnSpc>
-                <a:spcPct val="100000"/>
-              </a:lnSpc>
-              <a:spcAft>
-                <a:spcPts val="900"/>
-              </a:spcAft>
-              <a:buClr>
-                <a:srgbClr val="0F7C86"/>
-              </a:buClr>
-              <a:buSzPct val="100000"/>
-              <a:buChar char="▸"/>
-            </a:pPr>
-            <a:r>
-              <a:rPr lang="en-US" sz="1250" dirty="0">
-                <a:solidFill>
-                  <a:srgbClr val="434A63"/>
-                </a:solidFill>
-                <a:latin typeface="Arial" pitchFamily="34" charset="0"/>
-                <a:ea typeface="Arial" pitchFamily="34" charset="-122"/>
-                <a:cs typeface="Arial" pitchFamily="34" charset="-120"/>
-              </a:rPr>
-              <a:t>Zwei Leerzeichen je Ebene, niemals Tabs. Bei Fehlermeldungen zuerst die Einrückung prüfen.</a:t>
-            </a:r>
-            <a:endParaRPr lang="en-US" sz="1250" dirty="0"/>
-          </a:p>
-          <a:p>
-            <a:pPr marL="254000" indent="-254000">
-              <a:lnSpc>
-                <a:spcPct val="100000"/>
-              </a:lnSpc>
-              <a:spcAft>
-                <a:spcPts val="900"/>
-              </a:spcAft>
-              <a:buClr>
-                <a:srgbClr val="0F7C86"/>
-              </a:buClr>
-              <a:buSzPct val="100000"/>
-              <a:buChar char="▸"/>
-            </a:pPr>
-            <a:r>
-              <a:rPr lang="en-US" sz="1250" dirty="0">
-                <a:solidFill>
-                  <a:srgbClr val="434A63"/>
-                </a:solidFill>
-                <a:latin typeface="Arial" pitchFamily="34" charset="0"/>
-                <a:ea typeface="Arial" pitchFamily="34" charset="-122"/>
-                <a:cs typeface="Arial" pitchFamily="34" charset="-120"/>
-              </a:rPr>
-              <a:t>Schnell durch? Am Ende der Seite warten die Bonus-Experimente.</a:t>
-            </a:r>
-            <a:endParaRPr lang="en-US" sz="1250" dirty="0"/>
-          </a:p>
-          <a:p>
-            <a:pPr marL="254000" indent="-254000">
-              <a:lnSpc>
-                <a:spcPct val="100000"/>
-              </a:lnSpc>
-              <a:spcAft>
-                <a:spcPts val="900"/>
-              </a:spcAft>
-              <a:buClr>
-                <a:srgbClr val="0F7C86"/>
-              </a:buClr>
-              <a:buSzPct val="100000"/>
-              <a:buChar char="▸"/>
-            </a:pPr>
-            <a:r>
-              <a:rPr lang="en-US" sz="1250" dirty="0">
-                <a:solidFill>
-                  <a:srgbClr val="434A63"/>
-                </a:solidFill>
-                <a:latin typeface="Arial" pitchFamily="34" charset="0"/>
-                <a:ea typeface="Arial" pitchFamily="34" charset="-122"/>
-                <a:cs typeface="Arial" pitchFamily="34" charset="-120"/>
-              </a:rPr>
-              <a:t>Wenn es klemmt: erst die Stolpersteine-Seite, dann um Hilfe bitten.</a:t>
-            </a:r>
-            <a:endParaRPr lang="en-US" sz="1250" dirty="0"/>
-          </a:p>
-        </p:txBody>
-      </p:sp>
-      <p:sp>
-        <p:nvSpPr>
-          <p:cNvPr id="6" name="Shape 4"/>
-          <p:cNvSpPr/>
-          <p:nvPr/>
-        </p:nvSpPr>
-        <p:spPr>
-          <a:xfrm>
-            <a:off x="566928" y="3602736"/>
-            <a:ext cx="8010144" cy="822960"/>
+          <p:cNvPr id="5" name="Shape 3"/>
+          <p:cNvSpPr/>
+          <p:nvPr/>
+        </p:nvSpPr>
+        <p:spPr>
+          <a:xfrm>
+            <a:off x="438912" y="1792224"/>
+            <a:ext cx="8266176" cy="329184"/>
           </a:xfrm>
           <a:prstGeom prst="rect">
             <a:avLst/>
@@ -3465,14 +2755,464 @@
       </p:sp>
       <p:sp>
         <p:nvSpPr>
-          <p:cNvPr id="7" name="Shape 5"/>
-          <p:cNvSpPr/>
-          <p:nvPr/>
-        </p:nvSpPr>
-        <p:spPr>
-          <a:xfrm>
-            <a:off x="566928" y="3602736"/>
-            <a:ext cx="41148" cy="822960"/>
+          <p:cNvPr id="6" name="Text 4"/>
+          <p:cNvSpPr/>
+          <p:nvPr/>
+        </p:nvSpPr>
+        <p:spPr>
+          <a:xfrm>
+            <a:off x="566928" y="1792224"/>
+            <a:ext cx="914400" cy="329184"/>
+          </a:xfrm>
+          <a:prstGeom prst="rect">
+            <a:avLst/>
+          </a:prstGeom>
+          <a:noFill/>
+          <a:ln/>
+        </p:spPr>
+        <p:txBody>
+          <a:bodyPr wrap="square" lIns="0" tIns="0" rIns="0" bIns="0" rtlCol="0" anchor="ctr"/>
+          <a:lstStyle/>
+          <a:p>
+            <a:pPr indent="0" marL="0">
+              <a:buNone/>
+            </a:pPr>
+            <a:r>
+              <a:rPr lang="en-US" sz="1100" b="1" dirty="0">
+                <a:solidFill>
+                  <a:srgbClr val="9A6310"/>
+                </a:solidFill>
+                <a:latin typeface="Courier New" pitchFamily="34" charset="0"/>
+                <a:ea typeface="Courier New" pitchFamily="34" charset="-122"/>
+                <a:cs typeface="Courier New" pitchFamily="34" charset="-120"/>
+              </a:rPr>
+              <a:t>Teil 1</a:t>
+            </a:r>
+            <a:endParaRPr lang="en-US" sz="1100" dirty="0"/>
+          </a:p>
+        </p:txBody>
+      </p:sp>
+      <p:sp>
+        <p:nvSpPr>
+          <p:cNvPr id="7" name="Text 5"/>
+          <p:cNvSpPr/>
+          <p:nvPr/>
+        </p:nvSpPr>
+        <p:spPr>
+          <a:xfrm>
+            <a:off x="1481328" y="1792224"/>
+            <a:ext cx="7095744" cy="329184"/>
+          </a:xfrm>
+          <a:prstGeom prst="rect">
+            <a:avLst/>
+          </a:prstGeom>
+          <a:noFill/>
+          <a:ln/>
+        </p:spPr>
+        <p:txBody>
+          <a:bodyPr wrap="square" lIns="0" tIns="0" rIns="0" bIns="0" rtlCol="0" anchor="ctr"/>
+          <a:lstStyle/>
+          <a:p>
+            <a:pPr indent="0" marL="0">
+              <a:buNone/>
+            </a:pPr>
+            <a:r>
+              <a:rPr lang="en-US" sz="1100" dirty="0">
+                <a:solidFill>
+                  <a:srgbClr val="434A63"/>
+                </a:solidFill>
+                <a:latin typeface="Arial" pitchFamily="34" charset="0"/>
+                <a:ea typeface="Arial" pitchFamily="34" charset="-122"/>
+                <a:cs typeface="Arial" pitchFamily="34" charset="-120"/>
+              </a:rPr>
+              <a:t>compose.yaml schreiben: zwei Services, ein Volume</a:t>
+            </a:r>
+            <a:endParaRPr lang="en-US" sz="1100" dirty="0"/>
+          </a:p>
+        </p:txBody>
+      </p:sp>
+      <p:sp>
+        <p:nvSpPr>
+          <p:cNvPr id="8" name="Text 6"/>
+          <p:cNvSpPr/>
+          <p:nvPr/>
+        </p:nvSpPr>
+        <p:spPr>
+          <a:xfrm>
+            <a:off x="566928" y="2121408"/>
+            <a:ext cx="914400" cy="329184"/>
+          </a:xfrm>
+          <a:prstGeom prst="rect">
+            <a:avLst/>
+          </a:prstGeom>
+          <a:noFill/>
+          <a:ln/>
+        </p:spPr>
+        <p:txBody>
+          <a:bodyPr wrap="square" lIns="0" tIns="0" rIns="0" bIns="0" rtlCol="0" anchor="ctr"/>
+          <a:lstStyle/>
+          <a:p>
+            <a:pPr indent="0" marL="0">
+              <a:buNone/>
+            </a:pPr>
+            <a:r>
+              <a:rPr lang="en-US" sz="1100" b="1" dirty="0">
+                <a:solidFill>
+                  <a:srgbClr val="9A6310"/>
+                </a:solidFill>
+                <a:latin typeface="Courier New" pitchFamily="34" charset="0"/>
+                <a:ea typeface="Courier New" pitchFamily="34" charset="-122"/>
+                <a:cs typeface="Courier New" pitchFamily="34" charset="-120"/>
+              </a:rPr>
+              <a:t>Teil 2</a:t>
+            </a:r>
+            <a:endParaRPr lang="en-US" sz="1100" dirty="0"/>
+          </a:p>
+        </p:txBody>
+      </p:sp>
+      <p:sp>
+        <p:nvSpPr>
+          <p:cNvPr id="9" name="Text 7"/>
+          <p:cNvSpPr/>
+          <p:nvPr/>
+        </p:nvSpPr>
+        <p:spPr>
+          <a:xfrm>
+            <a:off x="1481328" y="2121408"/>
+            <a:ext cx="7095744" cy="329184"/>
+          </a:xfrm>
+          <a:prstGeom prst="rect">
+            <a:avLst/>
+          </a:prstGeom>
+          <a:noFill/>
+          <a:ln/>
+        </p:spPr>
+        <p:txBody>
+          <a:bodyPr wrap="square" lIns="0" tIns="0" rIns="0" bIns="0" rtlCol="0" anchor="ctr"/>
+          <a:lstStyle/>
+          <a:p>
+            <a:pPr indent="0" marL="0">
+              <a:buNone/>
+            </a:pPr>
+            <a:r>
+              <a:rPr lang="en-US" sz="1100" dirty="0">
+                <a:solidFill>
+                  <a:srgbClr val="434A63"/>
+                </a:solidFill>
+                <a:latin typeface="Arial" pitchFamily="34" charset="0"/>
+                <a:ea typeface="Arial" pitchFamily="34" charset="-122"/>
+                <a:cs typeface="Arial" pitchFamily="34" charset="-120"/>
+              </a:rPr>
+              <a:t>Stack starten, im Browser anmelden, Tabelle anlegen</a:t>
+            </a:r>
+            <a:endParaRPr lang="en-US" sz="1100" dirty="0"/>
+          </a:p>
+        </p:txBody>
+      </p:sp>
+      <p:sp>
+        <p:nvSpPr>
+          <p:cNvPr id="10" name="Shape 8"/>
+          <p:cNvSpPr/>
+          <p:nvPr/>
+        </p:nvSpPr>
+        <p:spPr>
+          <a:xfrm>
+            <a:off x="438912" y="2450592"/>
+            <a:ext cx="8266176" cy="329184"/>
+          </a:xfrm>
+          <a:prstGeom prst="rect">
+            <a:avLst/>
+          </a:prstGeom>
+          <a:solidFill>
+            <a:srgbClr val="F5F6FC"/>
+          </a:solidFill>
+          <a:ln/>
+        </p:spPr>
+      </p:sp>
+      <p:sp>
+        <p:nvSpPr>
+          <p:cNvPr id="11" name="Text 9"/>
+          <p:cNvSpPr/>
+          <p:nvPr/>
+        </p:nvSpPr>
+        <p:spPr>
+          <a:xfrm>
+            <a:off x="566928" y="2450592"/>
+            <a:ext cx="914400" cy="329184"/>
+          </a:xfrm>
+          <a:prstGeom prst="rect">
+            <a:avLst/>
+          </a:prstGeom>
+          <a:noFill/>
+          <a:ln/>
+        </p:spPr>
+        <p:txBody>
+          <a:bodyPr wrap="square" lIns="0" tIns="0" rIns="0" bIns="0" rtlCol="0" anchor="ctr"/>
+          <a:lstStyle/>
+          <a:p>
+            <a:pPr indent="0" marL="0">
+              <a:buNone/>
+            </a:pPr>
+            <a:r>
+              <a:rPr lang="en-US" sz="1100" b="1" dirty="0">
+                <a:solidFill>
+                  <a:srgbClr val="9A6310"/>
+                </a:solidFill>
+                <a:latin typeface="Courier New" pitchFamily="34" charset="0"/>
+                <a:ea typeface="Courier New" pitchFamily="34" charset="-122"/>
+                <a:cs typeface="Courier New" pitchFamily="34" charset="-120"/>
+              </a:rPr>
+              <a:t>Teil 3</a:t>
+            </a:r>
+            <a:endParaRPr lang="en-US" sz="1100" dirty="0"/>
+          </a:p>
+        </p:txBody>
+      </p:sp>
+      <p:sp>
+        <p:nvSpPr>
+          <p:cNvPr id="12" name="Text 10"/>
+          <p:cNvSpPr/>
+          <p:nvPr/>
+        </p:nvSpPr>
+        <p:spPr>
+          <a:xfrm>
+            <a:off x="1481328" y="2450592"/>
+            <a:ext cx="7095744" cy="329184"/>
+          </a:xfrm>
+          <a:prstGeom prst="rect">
+            <a:avLst/>
+          </a:prstGeom>
+          <a:noFill/>
+          <a:ln/>
+        </p:spPr>
+        <p:txBody>
+          <a:bodyPr wrap="square" lIns="0" tIns="0" rIns="0" bIns="0" rtlCol="0" anchor="ctr"/>
+          <a:lstStyle/>
+          <a:p>
+            <a:pPr indent="0" marL="0">
+              <a:buNone/>
+            </a:pPr>
+            <a:r>
+              <a:rPr lang="en-US" sz="1100" dirty="0">
+                <a:solidFill>
+                  <a:srgbClr val="434A63"/>
+                </a:solidFill>
+                <a:latin typeface="Arial" pitchFamily="34" charset="0"/>
+                <a:ea typeface="Arial" pitchFamily="34" charset="-122"/>
+                <a:cs typeface="Arial" pitchFamily="34" charset="-120"/>
+              </a:rPr>
+              <a:t>Härtetest die Zweite: down, up, sind die Daten noch da?</a:t>
+            </a:r>
+            <a:endParaRPr lang="en-US" sz="1100" dirty="0"/>
+          </a:p>
+        </p:txBody>
+      </p:sp>
+      <p:sp>
+        <p:nvSpPr>
+          <p:cNvPr id="13" name="Text 11"/>
+          <p:cNvSpPr/>
+          <p:nvPr/>
+        </p:nvSpPr>
+        <p:spPr>
+          <a:xfrm>
+            <a:off x="566928" y="2779776"/>
+            <a:ext cx="914400" cy="329184"/>
+          </a:xfrm>
+          <a:prstGeom prst="rect">
+            <a:avLst/>
+          </a:prstGeom>
+          <a:noFill/>
+          <a:ln/>
+        </p:spPr>
+        <p:txBody>
+          <a:bodyPr wrap="square" lIns="0" tIns="0" rIns="0" bIns="0" rtlCol="0" anchor="ctr"/>
+          <a:lstStyle/>
+          <a:p>
+            <a:pPr indent="0" marL="0">
+              <a:buNone/>
+            </a:pPr>
+            <a:r>
+              <a:rPr lang="en-US" sz="1100" b="1" dirty="0">
+                <a:solidFill>
+                  <a:srgbClr val="9A6310"/>
+                </a:solidFill>
+                <a:latin typeface="Courier New" pitchFamily="34" charset="0"/>
+                <a:ea typeface="Courier New" pitchFamily="34" charset="-122"/>
+                <a:cs typeface="Courier New" pitchFamily="34" charset="-120"/>
+              </a:rPr>
+              <a:t>Bonus</a:t>
+            </a:r>
+            <a:endParaRPr lang="en-US" sz="1100" dirty="0"/>
+          </a:p>
+        </p:txBody>
+      </p:sp>
+      <p:sp>
+        <p:nvSpPr>
+          <p:cNvPr id="14" name="Text 12"/>
+          <p:cNvSpPr/>
+          <p:nvPr/>
+        </p:nvSpPr>
+        <p:spPr>
+          <a:xfrm>
+            <a:off x="1481328" y="2779776"/>
+            <a:ext cx="7095744" cy="329184"/>
+          </a:xfrm>
+          <a:prstGeom prst="rect">
+            <a:avLst/>
+          </a:prstGeom>
+          <a:noFill/>
+          <a:ln/>
+        </p:spPr>
+        <p:txBody>
+          <a:bodyPr wrap="square" lIns="0" tIns="0" rIns="0" bIns="0" rtlCol="0" anchor="ctr"/>
+          <a:lstStyle/>
+          <a:p>
+            <a:pPr indent="0" marL="0">
+              <a:buNone/>
+            </a:pPr>
+            <a:r>
+              <a:rPr lang="en-US" sz="1100" dirty="0">
+                <a:solidFill>
+                  <a:srgbClr val="434A63"/>
+                </a:solidFill>
+                <a:latin typeface="Arial" pitchFamily="34" charset="0"/>
+                <a:ea typeface="Arial" pitchFamily="34" charset="-122"/>
+                <a:cs typeface="Arial" pitchFamily="34" charset="-120"/>
+              </a:rPr>
+              <a:t>Drei Experimente: zweiter Adminer im Stack, Logs verfolgen, config</a:t>
+            </a:r>
+            <a:endParaRPr lang="en-US" sz="1100" dirty="0"/>
+          </a:p>
+        </p:txBody>
+      </p:sp>
+      <p:sp>
+        <p:nvSpPr>
+          <p:cNvPr id="15" name="Shape 13"/>
+          <p:cNvSpPr/>
+          <p:nvPr/>
+        </p:nvSpPr>
+        <p:spPr>
+          <a:xfrm>
+            <a:off x="438912" y="3108960"/>
+            <a:ext cx="8266176" cy="329184"/>
+          </a:xfrm>
+          <a:prstGeom prst="rect">
+            <a:avLst/>
+          </a:prstGeom>
+          <a:solidFill>
+            <a:srgbClr val="F5F6FC"/>
+          </a:solidFill>
+          <a:ln/>
+        </p:spPr>
+      </p:sp>
+      <p:sp>
+        <p:nvSpPr>
+          <p:cNvPr id="16" name="Text 14"/>
+          <p:cNvSpPr/>
+          <p:nvPr/>
+        </p:nvSpPr>
+        <p:spPr>
+          <a:xfrm>
+            <a:off x="566928" y="3108960"/>
+            <a:ext cx="914400" cy="329184"/>
+          </a:xfrm>
+          <a:prstGeom prst="rect">
+            <a:avLst/>
+          </a:prstGeom>
+          <a:noFill/>
+          <a:ln/>
+        </p:spPr>
+        <p:txBody>
+          <a:bodyPr wrap="square" lIns="0" tIns="0" rIns="0" bIns="0" rtlCol="0" anchor="ctr"/>
+          <a:lstStyle/>
+          <a:p>
+            <a:pPr indent="0" marL="0">
+              <a:buNone/>
+            </a:pPr>
+            <a:r>
+              <a:rPr lang="en-US" sz="1100" b="1" dirty="0">
+                <a:solidFill>
+                  <a:srgbClr val="9A6310"/>
+                </a:solidFill>
+                <a:latin typeface="Courier New" pitchFamily="34" charset="0"/>
+                <a:ea typeface="Courier New" pitchFamily="34" charset="-122"/>
+                <a:cs typeface="Courier New" pitchFamily="34" charset="-120"/>
+              </a:rPr>
+              <a:t>Notieren</a:t>
+            </a:r>
+            <a:endParaRPr lang="en-US" sz="1100" dirty="0"/>
+          </a:p>
+        </p:txBody>
+      </p:sp>
+      <p:sp>
+        <p:nvSpPr>
+          <p:cNvPr id="17" name="Text 15"/>
+          <p:cNvSpPr/>
+          <p:nvPr/>
+        </p:nvSpPr>
+        <p:spPr>
+          <a:xfrm>
+            <a:off x="1481328" y="3108960"/>
+            <a:ext cx="7095744" cy="329184"/>
+          </a:xfrm>
+          <a:prstGeom prst="rect">
+            <a:avLst/>
+          </a:prstGeom>
+          <a:noFill/>
+          <a:ln/>
+        </p:spPr>
+        <p:txBody>
+          <a:bodyPr wrap="square" lIns="0" tIns="0" rIns="0" bIns="0" rtlCol="0" anchor="ctr"/>
+          <a:lstStyle/>
+          <a:p>
+            <a:pPr indent="0" marL="0">
+              <a:buNone/>
+            </a:pPr>
+            <a:r>
+              <a:rPr lang="en-US" sz="1100" dirty="0">
+                <a:solidFill>
+                  <a:srgbClr val="434A63"/>
+                </a:solidFill>
+                <a:latin typeface="Arial" pitchFamily="34" charset="0"/>
+                <a:ea typeface="Arial" pitchFamily="34" charset="-122"/>
+                <a:cs typeface="Arial" pitchFamily="34" charset="-120"/>
+              </a:rPr>
+              <a:t>Eure Antwort: Was löscht down und was löscht erst down -v?</a:t>
+            </a:r>
+            <a:endParaRPr lang="en-US" sz="1100" dirty="0"/>
+          </a:p>
+        </p:txBody>
+      </p:sp>
+      <p:sp>
+        <p:nvSpPr>
+          <p:cNvPr id="18" name="Shape 16"/>
+          <p:cNvSpPr/>
+          <p:nvPr/>
+        </p:nvSpPr>
+        <p:spPr>
+          <a:xfrm>
+            <a:off x="566928" y="3456432"/>
+            <a:ext cx="8010144" cy="1097280"/>
+          </a:xfrm>
+          <a:prstGeom prst="rect">
+            <a:avLst/>
+          </a:prstGeom>
+          <a:solidFill>
+            <a:srgbClr val="EEF0FB"/>
+          </a:solidFill>
+          <a:ln/>
+        </p:spPr>
+      </p:sp>
+      <p:sp>
+        <p:nvSpPr>
+          <p:cNvPr id="19" name="Shape 17"/>
+          <p:cNvSpPr/>
+          <p:nvPr/>
+        </p:nvSpPr>
+        <p:spPr>
+          <a:xfrm>
+            <a:off x="566928" y="3456432"/>
+            <a:ext cx="41148" cy="1097280"/>
           </a:xfrm>
           <a:prstGeom prst="rect">
             <a:avLst/>
@@ -3485,13 +3225,13 @@
       </p:sp>
       <p:sp>
         <p:nvSpPr>
-          <p:cNvPr id="8" name="Text 6"/>
-          <p:cNvSpPr/>
-          <p:nvPr/>
-        </p:nvSpPr>
-        <p:spPr>
-          <a:xfrm>
-            <a:off x="804672" y="3749040"/>
+          <p:cNvPr id="20" name="Text 18"/>
+          <p:cNvSpPr/>
+          <p:nvPr/>
+        </p:nvSpPr>
+        <p:spPr>
+          <a:xfrm>
+            <a:off x="804672" y="3602736"/>
             <a:ext cx="7607808" cy="242062"/>
           </a:xfrm>
           <a:prstGeom prst="rect">
@@ -3516,7 +3256,7 @@
                 <a:ea typeface="Arial" pitchFamily="34" charset="-122"/>
                 <a:cs typeface="Arial" pitchFamily="34" charset="-120"/>
               </a:rPr>
-              <a:t>Um 19:55 sind alle wieder hier</a:t>
+              <a:t>Jetzt öffnen, alles braucht ihr gleich im Raum</a:t>
             </a:r>
             <a:endParaRPr lang="en-US" sz="1300" dirty="0"/>
           </a:p>
@@ -3524,14 +3264,14 @@
       </p:sp>
       <p:sp>
         <p:nvSpPr>
-          <p:cNvPr id="9" name="Text 7"/>
-          <p:cNvSpPr/>
-          <p:nvPr/>
-        </p:nvSpPr>
-        <p:spPr>
-          <a:xfrm>
-            <a:off x="804672" y="4036822"/>
-            <a:ext cx="7607808" cy="270002"/>
+          <p:cNvPr id="21" name="Text 19"/>
+          <p:cNvSpPr/>
+          <p:nvPr/>
+        </p:nvSpPr>
+        <p:spPr>
+          <a:xfrm>
+            <a:off x="804672" y="3890518"/>
+            <a:ext cx="7607808" cy="544322"/>
           </a:xfrm>
           <a:prstGeom prst="rect">
             <a:avLst/>
@@ -3547,10 +3287,13 @@
               <a:lnSpc>
                 <a:spcPct val="92000"/>
               </a:lnSpc>
-              <a:buNone/>
-            </a:pPr>
-            <a:r>
-              <a:rPr lang="en-US" sz="1150" dirty="0">
+              <a:spcAft>
+                <a:spcPts val="500"/>
+              </a:spcAft>
+              <a:buNone/>
+            </a:pPr>
+            <a:r>
+              <a:rPr lang="en-US" sz="1000" dirty="0">
                 <a:solidFill>
                   <a:srgbClr val="434A63"/>
                 </a:solidFill>
@@ -3558,15 +3301,61 @@
                 <a:ea typeface="Arial" pitchFamily="34" charset="-122"/>
                 <a:cs typeface="Arial" pitchFamily="34" charset="-120"/>
               </a:rPr>
-              <a:t>Jede Gruppe zeigt ihre compose.yaml und beantwortet die down-v-Frage aus dem eigenen Versuch.</a:t>
-            </a:r>
-            <a:endParaRPr lang="en-US" sz="1150" dirty="0"/>
-          </a:p>
-        </p:txBody>
-      </p:sp>
-      <p:sp>
-        <p:nvSpPr>
-          <p:cNvPr id="10" name="Shape 8"/>
+              <a:t>Übung:  jacobmenge.github.io/kurs-unterlagen/docker-compose/praxis-webapp/</a:t>
+            </a:r>
+            <a:endParaRPr lang="en-US" sz="1000" dirty="0"/>
+          </a:p>
+          <a:p>
+            <a:pPr indent="0" marL="0">
+              <a:lnSpc>
+                <a:spcPct val="92000"/>
+              </a:lnSpc>
+              <a:spcAft>
+                <a:spcPts val="500"/>
+              </a:spcAft>
+              <a:buNone/>
+            </a:pPr>
+            <a:r>
+              <a:rPr lang="en-US" sz="1000" dirty="0">
+                <a:solidFill>
+                  <a:srgbClr val="434A63"/>
+                </a:solidFill>
+                <a:latin typeface="Arial" pitchFamily="34" charset="0"/>
+                <a:ea typeface="Arial" pitchFamily="34" charset="-122"/>
+                <a:cs typeface="Arial" pitchFamily="34" charset="-120"/>
+              </a:rPr>
+              <a:t>Wenn es klemmt:  jacobmenge.github.io/kurs-unterlagen/docker-compose/stolpersteine/</a:t>
+            </a:r>
+            <a:endParaRPr lang="en-US" sz="1000" dirty="0"/>
+          </a:p>
+          <a:p>
+            <a:pPr indent="0" marL="0">
+              <a:lnSpc>
+                <a:spcPct val="92000"/>
+              </a:lnSpc>
+              <a:spcAft>
+                <a:spcPts val="500"/>
+              </a:spcAft>
+              <a:buNone/>
+            </a:pPr>
+            <a:r>
+              <a:rPr lang="en-US" sz="1000" dirty="0">
+                <a:solidFill>
+                  <a:srgbClr val="434A63"/>
+                </a:solidFill>
+                <a:latin typeface="Arial" pitchFamily="34" charset="0"/>
+                <a:ea typeface="Arial" pitchFamily="34" charset="-122"/>
+                <a:cs typeface="Arial" pitchFamily="34" charset="-120"/>
+              </a:rPr>
+              <a:t>Ergebnisse eintragen:  &lt;Link zum Ergebnis-Dokument hier eintragen&gt;</a:t>
+            </a:r>
+            <a:endParaRPr lang="en-US" sz="1000" dirty="0"/>
+          </a:p>
+        </p:txBody>
+      </p:sp>
+      <p:sp>
+        <p:nvSpPr>
+          <p:cNvPr id="22" name="Shape 20"/>
           <p:cNvSpPr/>
           <p:nvPr/>
         </p:nvSpPr>
@@ -3589,7 +3378,7 @@
       </p:sp>
       <p:sp>
         <p:nvSpPr>
-          <p:cNvPr id="11" name="Text 9"/>
+          <p:cNvPr id="23" name="Text 21"/>
           <p:cNvSpPr/>
           <p:nvPr/>
         </p:nvSpPr>
@@ -3628,7 +3417,7 @@
       </p:sp>
       <p:sp>
         <p:nvSpPr>
-          <p:cNvPr id="12" name="Text 10"/>
+          <p:cNvPr id="24" name="Text 22"/>
           <p:cNvSpPr/>
           <p:nvPr/>
         </p:nvSpPr>
@@ -3659,7 +3448,7 @@
                 <a:ea typeface="Arial" pitchFamily="34" charset="-122"/>
                 <a:cs typeface="Arial" pitchFamily="34" charset="-120"/>
               </a:rPr>
-              <a:t>8/11</a:t>
+              <a:t>8/12</a:t>
             </a:r>
             <a:endParaRPr lang="en-US" sz="1050" dirty="0"/>
           </a:p>
@@ -3712,7 +3501,7 @@
             <a:avLst/>
           </a:prstGeom>
           <a:solidFill>
-            <a:srgbClr val="0F7C86"/>
+            <a:srgbClr val="9A6310"/>
           </a:solidFill>
           <a:ln/>
         </p:spPr>
@@ -3744,13 +3533,13 @@
             <a:r>
               <a:rPr lang="en-US" sz="1150" b="1" spc="180" kern="0" dirty="0">
                 <a:solidFill>
-                  <a:srgbClr val="0F7C86"/>
-                </a:solidFill>
-                <a:latin typeface="Arial" pitchFamily="34" charset="0"/>
-                <a:ea typeface="Arial" pitchFamily="34" charset="-122"/>
-                <a:cs typeface="Arial" pitchFamily="34" charset="-120"/>
-              </a:rPr>
-              <a:t>AUSWERTUNG · 30 MINUTEN</a:t>
+                  <a:srgbClr val="9A6310"/>
+                </a:solidFill>
+                <a:latin typeface="Arial" pitchFamily="34" charset="0"/>
+                <a:ea typeface="Arial" pitchFamily="34" charset="-122"/>
+                <a:cs typeface="Arial" pitchFamily="34" charset="-120"/>
+              </a:rPr>
+              <a:t>SPIELREGELN</a:t>
             </a:r>
             <a:endParaRPr lang="en-US" sz="1150" dirty="0"/>
           </a:p>
@@ -3789,7 +3578,7 @@
                 <a:ea typeface="Arial" pitchFamily="34" charset="-122"/>
                 <a:cs typeface="Arial" pitchFamily="34" charset="-120"/>
               </a:rPr>
-              <a:t>Eure Stacks</a:t>
+              <a:t>So arbeitet ihr</a:t>
             </a:r>
             <a:endParaRPr lang="en-US" sz="2600" dirty="0"/>
           </a:p>
@@ -3797,14 +3586,171 @@
       </p:sp>
       <p:sp>
         <p:nvSpPr>
-          <p:cNvPr id="5" name="Shape 3"/>
-          <p:cNvSpPr/>
-          <p:nvPr/>
-        </p:nvSpPr>
-        <p:spPr>
-          <a:xfrm>
-            <a:off x="438912" y="1810512"/>
-            <a:ext cx="8266176" cy="365760"/>
+          <p:cNvPr id="5" name="Text 3"/>
+          <p:cNvSpPr/>
+          <p:nvPr/>
+        </p:nvSpPr>
+        <p:spPr>
+          <a:xfrm>
+            <a:off x="566928" y="1700784"/>
+            <a:ext cx="8010144" cy="1828800"/>
+          </a:xfrm>
+          <a:prstGeom prst="rect">
+            <a:avLst/>
+          </a:prstGeom>
+          <a:noFill/>
+          <a:ln/>
+        </p:spPr>
+        <p:txBody>
+          <a:bodyPr wrap="square" lIns="0" tIns="0" rIns="0" bIns="0" rtlCol="0" anchor="t"/>
+          <a:lstStyle/>
+          <a:p>
+            <a:pPr marL="254000" indent="-254000">
+              <a:lnSpc>
+                <a:spcPct val="100000"/>
+              </a:lnSpc>
+              <a:spcAft>
+                <a:spcPts val="900"/>
+              </a:spcAft>
+              <a:buClr>
+                <a:srgbClr val="0F7C86"/>
+              </a:buClr>
+              <a:buSzPct val="100000"/>
+              <a:buChar char="▸"/>
+            </a:pPr>
+            <a:r>
+              <a:rPr lang="en-US" sz="1250" dirty="0">
+                <a:solidFill>
+                  <a:srgbClr val="434A63"/>
+                </a:solidFill>
+                <a:latin typeface="Arial" pitchFamily="34" charset="0"/>
+                <a:ea typeface="Arial" pitchFamily="34" charset="-122"/>
+                <a:cs typeface="Arial" pitchFamily="34" charset="-120"/>
+              </a:rPr>
+              <a:t>Gleiche Gruppen, eine Person teilt den Bildschirm, alle tippen selbst mit, Windows wie immer in der PowerShell.</a:t>
+            </a:r>
+            <a:endParaRPr lang="en-US" sz="1250" dirty="0"/>
+          </a:p>
+          <a:p>
+            <a:pPr marL="254000" indent="-254000">
+              <a:lnSpc>
+                <a:spcPct val="100000"/>
+              </a:lnSpc>
+              <a:spcAft>
+                <a:spcPts val="900"/>
+              </a:spcAft>
+              <a:buClr>
+                <a:srgbClr val="0F7C86"/>
+              </a:buClr>
+              <a:buSzPct val="100000"/>
+              <a:buChar char="▸"/>
+            </a:pPr>
+            <a:r>
+              <a:rPr lang="en-US" sz="1250" dirty="0">
+                <a:solidFill>
+                  <a:srgbClr val="434A63"/>
+                </a:solidFill>
+                <a:latin typeface="Arial" pitchFamily="34" charset="0"/>
+                <a:ea typeface="Arial" pitchFamily="34" charset="-122"/>
+                <a:cs typeface="Arial" pitchFamily="34" charset="-120"/>
+              </a:rPr>
+              <a:t>Die YAML-Datei tippt ihr ab, statt sie zu kopieren. Die Einrückung ist der halbe Lernstoff.</a:t>
+            </a:r>
+            <a:endParaRPr lang="en-US" sz="1250" dirty="0"/>
+          </a:p>
+          <a:p>
+            <a:pPr marL="254000" indent="-254000">
+              <a:lnSpc>
+                <a:spcPct val="100000"/>
+              </a:lnSpc>
+              <a:spcAft>
+                <a:spcPts val="900"/>
+              </a:spcAft>
+              <a:buClr>
+                <a:srgbClr val="0F7C86"/>
+              </a:buClr>
+              <a:buSzPct val="100000"/>
+              <a:buChar char="▸"/>
+            </a:pPr>
+            <a:r>
+              <a:rPr lang="en-US" sz="1250" dirty="0">
+                <a:solidFill>
+                  <a:srgbClr val="434A63"/>
+                </a:solidFill>
+                <a:latin typeface="Arial" pitchFamily="34" charset="0"/>
+                <a:ea typeface="Arial" pitchFamily="34" charset="-122"/>
+                <a:cs typeface="Arial" pitchFamily="34" charset="-120"/>
+              </a:rPr>
+              <a:t>Zwei Leerzeichen je Ebene, niemals Tabs. Bei Fehlermeldungen zuerst die Einrückung prüfen.</a:t>
+            </a:r>
+            <a:endParaRPr lang="en-US" sz="1250" dirty="0"/>
+          </a:p>
+          <a:p>
+            <a:pPr marL="254000" indent="-254000">
+              <a:lnSpc>
+                <a:spcPct val="100000"/>
+              </a:lnSpc>
+              <a:spcAft>
+                <a:spcPts val="900"/>
+              </a:spcAft>
+              <a:buClr>
+                <a:srgbClr val="0F7C86"/>
+              </a:buClr>
+              <a:buSzPct val="100000"/>
+              <a:buChar char="▸"/>
+            </a:pPr>
+            <a:r>
+              <a:rPr lang="en-US" sz="1250" dirty="0">
+                <a:solidFill>
+                  <a:srgbClr val="434A63"/>
+                </a:solidFill>
+                <a:latin typeface="Arial" pitchFamily="34" charset="0"/>
+                <a:ea typeface="Arial" pitchFamily="34" charset="-122"/>
+                <a:cs typeface="Arial" pitchFamily="34" charset="-120"/>
+              </a:rPr>
+              <a:t>Schnell durch? Am Ende der Seite warten die Bonus-Experimente.</a:t>
+            </a:r>
+            <a:endParaRPr lang="en-US" sz="1250" dirty="0"/>
+          </a:p>
+          <a:p>
+            <a:pPr marL="254000" indent="-254000">
+              <a:lnSpc>
+                <a:spcPct val="100000"/>
+              </a:lnSpc>
+              <a:spcAft>
+                <a:spcPts val="900"/>
+              </a:spcAft>
+              <a:buClr>
+                <a:srgbClr val="0F7C86"/>
+              </a:buClr>
+              <a:buSzPct val="100000"/>
+              <a:buChar char="▸"/>
+            </a:pPr>
+            <a:r>
+              <a:rPr lang="en-US" sz="1250" dirty="0">
+                <a:solidFill>
+                  <a:srgbClr val="434A63"/>
+                </a:solidFill>
+                <a:latin typeface="Arial" pitchFamily="34" charset="0"/>
+                <a:ea typeface="Arial" pitchFamily="34" charset="-122"/>
+                <a:cs typeface="Arial" pitchFamily="34" charset="-120"/>
+              </a:rPr>
+              <a:t>Wenn es klemmt: erst die Stolpersteine-Seite, dann um Hilfe bitten.</a:t>
+            </a:r>
+            <a:endParaRPr lang="en-US" sz="1250" dirty="0"/>
+          </a:p>
+        </p:txBody>
+      </p:sp>
+      <p:sp>
+        <p:nvSpPr>
+          <p:cNvPr id="6" name="Shape 4"/>
+          <p:cNvSpPr/>
+          <p:nvPr/>
+        </p:nvSpPr>
+        <p:spPr>
+          <a:xfrm>
+            <a:off x="566928" y="3602736"/>
+            <a:ext cx="8010144" cy="822960"/>
           </a:xfrm>
           <a:prstGeom prst="rect">
             <a:avLst/>
@@ -3817,69 +3763,92 @@
       </p:sp>
       <p:sp>
         <p:nvSpPr>
-          <p:cNvPr id="6" name="Text 4"/>
-          <p:cNvSpPr/>
-          <p:nvPr/>
-        </p:nvSpPr>
-        <p:spPr>
-          <a:xfrm>
-            <a:off x="566928" y="1810512"/>
-            <a:ext cx="548640" cy="365760"/>
-          </a:xfrm>
-          <a:prstGeom prst="rect">
-            <a:avLst/>
-          </a:prstGeom>
-          <a:noFill/>
-          <a:ln/>
-        </p:spPr>
-        <p:txBody>
-          <a:bodyPr wrap="square" lIns="0" tIns="0" rIns="0" bIns="0" rtlCol="0" anchor="ctr"/>
-          <a:lstStyle/>
-          <a:p>
-            <a:pPr indent="0" marL="0">
-              <a:buNone/>
-            </a:pPr>
-            <a:r>
-              <a:rPr lang="en-US" sz="1200" b="1" dirty="0">
-                <a:solidFill>
-                  <a:srgbClr val="0F7C86"/>
-                </a:solidFill>
-                <a:latin typeface="Courier New" pitchFamily="34" charset="0"/>
-                <a:ea typeface="Courier New" pitchFamily="34" charset="-122"/>
-                <a:cs typeface="Courier New" pitchFamily="34" charset="-120"/>
-              </a:rPr>
-              <a:t>1</a:t>
-            </a:r>
-            <a:endParaRPr lang="en-US" sz="1200" dirty="0"/>
-          </a:p>
-        </p:txBody>
-      </p:sp>
-      <p:sp>
-        <p:nvSpPr>
-          <p:cNvPr id="7" name="Text 5"/>
-          <p:cNvSpPr/>
-          <p:nvPr/>
-        </p:nvSpPr>
-        <p:spPr>
-          <a:xfrm>
-            <a:off x="1115568" y="1810512"/>
-            <a:ext cx="7461504" cy="365760"/>
-          </a:xfrm>
-          <a:prstGeom prst="rect">
-            <a:avLst/>
-          </a:prstGeom>
-          <a:noFill/>
-          <a:ln/>
-        </p:spPr>
-        <p:txBody>
-          <a:bodyPr wrap="square" lIns="0" tIns="0" rIns="0" bIns="0" rtlCol="0" anchor="ctr"/>
-          <a:lstStyle/>
-          <a:p>
-            <a:pPr indent="0" marL="0">
-              <a:buNone/>
-            </a:pPr>
-            <a:r>
-              <a:rPr lang="en-US" sz="1200" dirty="0">
+          <p:cNvPr id="7" name="Shape 5"/>
+          <p:cNvSpPr/>
+          <p:nvPr/>
+        </p:nvSpPr>
+        <p:spPr>
+          <a:xfrm>
+            <a:off x="566928" y="3602736"/>
+            <a:ext cx="41148" cy="822960"/>
+          </a:xfrm>
+          <a:prstGeom prst="rect">
+            <a:avLst/>
+          </a:prstGeom>
+          <a:solidFill>
+            <a:srgbClr val="9A6310"/>
+          </a:solidFill>
+          <a:ln/>
+        </p:spPr>
+      </p:sp>
+      <p:sp>
+        <p:nvSpPr>
+          <p:cNvPr id="8" name="Text 6"/>
+          <p:cNvSpPr/>
+          <p:nvPr/>
+        </p:nvSpPr>
+        <p:spPr>
+          <a:xfrm>
+            <a:off x="804672" y="3749040"/>
+            <a:ext cx="7607808" cy="242062"/>
+          </a:xfrm>
+          <a:prstGeom prst="rect">
+            <a:avLst/>
+          </a:prstGeom>
+          <a:noFill/>
+          <a:ln/>
+        </p:spPr>
+        <p:txBody>
+          <a:bodyPr wrap="square" lIns="0" tIns="0" rIns="0" bIns="0" rtlCol="0" anchor="t"/>
+          <a:lstStyle/>
+          <a:p>
+            <a:pPr indent="0" marL="0">
+              <a:buNone/>
+            </a:pPr>
+            <a:r>
+              <a:rPr lang="en-US" sz="1300" b="1" dirty="0">
+                <a:solidFill>
+                  <a:srgbClr val="272E52"/>
+                </a:solidFill>
+                <a:latin typeface="Arial" pitchFamily="34" charset="0"/>
+                <a:ea typeface="Arial" pitchFamily="34" charset="-122"/>
+                <a:cs typeface="Arial" pitchFamily="34" charset="-120"/>
+              </a:rPr>
+              <a:t>Um 19:55 sind alle wieder hier</a:t>
+            </a:r>
+            <a:endParaRPr lang="en-US" sz="1300" dirty="0"/>
+          </a:p>
+        </p:txBody>
+      </p:sp>
+      <p:sp>
+        <p:nvSpPr>
+          <p:cNvPr id="9" name="Text 7"/>
+          <p:cNvSpPr/>
+          <p:nvPr/>
+        </p:nvSpPr>
+        <p:spPr>
+          <a:xfrm>
+            <a:off x="804672" y="4036822"/>
+            <a:ext cx="7607808" cy="270002"/>
+          </a:xfrm>
+          <a:prstGeom prst="rect">
+            <a:avLst/>
+          </a:prstGeom>
+          <a:noFill/>
+          <a:ln/>
+        </p:spPr>
+        <p:txBody>
+          <a:bodyPr wrap="square" lIns="0" tIns="0" rIns="0" bIns="0" rtlCol="0" anchor="t"/>
+          <a:lstStyle/>
+          <a:p>
+            <a:pPr indent="0" marL="0">
+              <a:lnSpc>
+                <a:spcPct val="92000"/>
+              </a:lnSpc>
+              <a:buNone/>
+            </a:pPr>
+            <a:r>
+              <a:rPr lang="en-US" sz="1150" dirty="0">
                 <a:solidFill>
                   <a:srgbClr val="434A63"/>
                 </a:solidFill>
@@ -3887,426 +3856,15 @@
                 <a:ea typeface="Arial" pitchFamily="34" charset="-122"/>
                 <a:cs typeface="Arial" pitchFamily="34" charset="-120"/>
               </a:rPr>
-              <a:t>Eine Gruppe teilt ihre compose.yaml: Wir lesen sie gemeinsam Zeile für Zeile.</a:t>
-            </a:r>
-            <a:endParaRPr lang="en-US" sz="1200" dirty="0"/>
-          </a:p>
-        </p:txBody>
-      </p:sp>
-      <p:sp>
-        <p:nvSpPr>
-          <p:cNvPr id="8" name="Text 6"/>
-          <p:cNvSpPr/>
-          <p:nvPr/>
-        </p:nvSpPr>
-        <p:spPr>
-          <a:xfrm>
-            <a:off x="566928" y="2176272"/>
-            <a:ext cx="548640" cy="365760"/>
-          </a:xfrm>
-          <a:prstGeom prst="rect">
-            <a:avLst/>
-          </a:prstGeom>
-          <a:noFill/>
-          <a:ln/>
-        </p:spPr>
-        <p:txBody>
-          <a:bodyPr wrap="square" lIns="0" tIns="0" rIns="0" bIns="0" rtlCol="0" anchor="ctr"/>
-          <a:lstStyle/>
-          <a:p>
-            <a:pPr indent="0" marL="0">
-              <a:buNone/>
-            </a:pPr>
-            <a:r>
-              <a:rPr lang="en-US" sz="1200" b="1" dirty="0">
-                <a:solidFill>
-                  <a:srgbClr val="0F7C86"/>
-                </a:solidFill>
-                <a:latin typeface="Courier New" pitchFamily="34" charset="0"/>
-                <a:ea typeface="Courier New" pitchFamily="34" charset="-122"/>
-                <a:cs typeface="Courier New" pitchFamily="34" charset="-120"/>
-              </a:rPr>
-              <a:t>2</a:t>
-            </a:r>
-            <a:endParaRPr lang="en-US" sz="1200" dirty="0"/>
-          </a:p>
-        </p:txBody>
-      </p:sp>
-      <p:sp>
-        <p:nvSpPr>
-          <p:cNvPr id="9" name="Text 7"/>
-          <p:cNvSpPr/>
-          <p:nvPr/>
-        </p:nvSpPr>
-        <p:spPr>
-          <a:xfrm>
-            <a:off x="1115568" y="2176272"/>
-            <a:ext cx="7461504" cy="365760"/>
-          </a:xfrm>
-          <a:prstGeom prst="rect">
-            <a:avLst/>
-          </a:prstGeom>
-          <a:noFill/>
-          <a:ln/>
-        </p:spPr>
-        <p:txBody>
-          <a:bodyPr wrap="square" lIns="0" tIns="0" rIns="0" bIns="0" rtlCol="0" anchor="ctr"/>
-          <a:lstStyle/>
-          <a:p>
-            <a:pPr indent="0" marL="0">
-              <a:buNone/>
-            </a:pPr>
-            <a:r>
-              <a:rPr lang="en-US" sz="1200" dirty="0">
-                <a:solidFill>
-                  <a:srgbClr val="434A63"/>
-                </a:solidFill>
-                <a:latin typeface="Arial" pitchFamily="34" charset="0"/>
-                <a:ea typeface="Arial" pitchFamily="34" charset="-122"/>
-                <a:cs typeface="Arial" pitchFamily="34" charset="-120"/>
-              </a:rPr>
-              <a:t>Der Vergleich: Montag fünf Befehle, heute einer. Was davon steckt jetzt wo?</a:t>
-            </a:r>
-            <a:endParaRPr lang="en-US" sz="1200" dirty="0"/>
+              <a:t>Jede Gruppe zeigt ihre compose.yaml und beantwortet die down-v-Frage aus dem eigenen Versuch.</a:t>
+            </a:r>
+            <a:endParaRPr lang="en-US" sz="1150" dirty="0"/>
           </a:p>
         </p:txBody>
       </p:sp>
       <p:sp>
         <p:nvSpPr>
           <p:cNvPr id="10" name="Shape 8"/>
-          <p:cNvSpPr/>
-          <p:nvPr/>
-        </p:nvSpPr>
-        <p:spPr>
-          <a:xfrm>
-            <a:off x="438912" y="2542032"/>
-            <a:ext cx="8266176" cy="365760"/>
-          </a:xfrm>
-          <a:prstGeom prst="rect">
-            <a:avLst/>
-          </a:prstGeom>
-          <a:solidFill>
-            <a:srgbClr val="F5F6FC"/>
-          </a:solidFill>
-          <a:ln/>
-        </p:spPr>
-      </p:sp>
-      <p:sp>
-        <p:nvSpPr>
-          <p:cNvPr id="11" name="Text 9"/>
-          <p:cNvSpPr/>
-          <p:nvPr/>
-        </p:nvSpPr>
-        <p:spPr>
-          <a:xfrm>
-            <a:off x="566928" y="2542032"/>
-            <a:ext cx="548640" cy="365760"/>
-          </a:xfrm>
-          <a:prstGeom prst="rect">
-            <a:avLst/>
-          </a:prstGeom>
-          <a:noFill/>
-          <a:ln/>
-        </p:spPr>
-        <p:txBody>
-          <a:bodyPr wrap="square" lIns="0" tIns="0" rIns="0" bIns="0" rtlCol="0" anchor="ctr"/>
-          <a:lstStyle/>
-          <a:p>
-            <a:pPr indent="0" marL="0">
-              <a:buNone/>
-            </a:pPr>
-            <a:r>
-              <a:rPr lang="en-US" sz="1200" b="1" dirty="0">
-                <a:solidFill>
-                  <a:srgbClr val="0F7C86"/>
-                </a:solidFill>
-                <a:latin typeface="Courier New" pitchFamily="34" charset="0"/>
-                <a:ea typeface="Courier New" pitchFamily="34" charset="-122"/>
-                <a:cs typeface="Courier New" pitchFamily="34" charset="-120"/>
-              </a:rPr>
-              <a:t>3</a:t>
-            </a:r>
-            <a:endParaRPr lang="en-US" sz="1200" dirty="0"/>
-          </a:p>
-        </p:txBody>
-      </p:sp>
-      <p:sp>
-        <p:nvSpPr>
-          <p:cNvPr id="12" name="Text 10"/>
-          <p:cNvSpPr/>
-          <p:nvPr/>
-        </p:nvSpPr>
-        <p:spPr>
-          <a:xfrm>
-            <a:off x="1115568" y="2542032"/>
-            <a:ext cx="7461504" cy="365760"/>
-          </a:xfrm>
-          <a:prstGeom prst="rect">
-            <a:avLst/>
-          </a:prstGeom>
-          <a:noFill/>
-          <a:ln/>
-        </p:spPr>
-        <p:txBody>
-          <a:bodyPr wrap="square" lIns="0" tIns="0" rIns="0" bIns="0" rtlCol="0" anchor="ctr"/>
-          <a:lstStyle/>
-          <a:p>
-            <a:pPr indent="0" marL="0">
-              <a:buNone/>
-            </a:pPr>
-            <a:r>
-              <a:rPr lang="en-US" sz="1200" dirty="0">
-                <a:solidFill>
-                  <a:srgbClr val="434A63"/>
-                </a:solidFill>
-                <a:latin typeface="Arial" pitchFamily="34" charset="0"/>
-                <a:ea typeface="Arial" pitchFamily="34" charset="-122"/>
-                <a:cs typeface="Arial" pitchFamily="34" charset="-120"/>
-              </a:rPr>
-              <a:t>Härtetest die Zweite: Was hat down überlebt und warum?</a:t>
-            </a:r>
-            <a:endParaRPr lang="en-US" sz="1200" dirty="0"/>
-          </a:p>
-        </p:txBody>
-      </p:sp>
-      <p:sp>
-        <p:nvSpPr>
-          <p:cNvPr id="13" name="Text 11"/>
-          <p:cNvSpPr/>
-          <p:nvPr/>
-        </p:nvSpPr>
-        <p:spPr>
-          <a:xfrm>
-            <a:off x="566928" y="2907792"/>
-            <a:ext cx="548640" cy="365760"/>
-          </a:xfrm>
-          <a:prstGeom prst="rect">
-            <a:avLst/>
-          </a:prstGeom>
-          <a:noFill/>
-          <a:ln/>
-        </p:spPr>
-        <p:txBody>
-          <a:bodyPr wrap="square" lIns="0" tIns="0" rIns="0" bIns="0" rtlCol="0" anchor="ctr"/>
-          <a:lstStyle/>
-          <a:p>
-            <a:pPr indent="0" marL="0">
-              <a:buNone/>
-            </a:pPr>
-            <a:r>
-              <a:rPr lang="en-US" sz="1200" b="1" dirty="0">
-                <a:solidFill>
-                  <a:srgbClr val="0F7C86"/>
-                </a:solidFill>
-                <a:latin typeface="Courier New" pitchFamily="34" charset="0"/>
-                <a:ea typeface="Courier New" pitchFamily="34" charset="-122"/>
-                <a:cs typeface="Courier New" pitchFamily="34" charset="-120"/>
-              </a:rPr>
-              <a:t>4</a:t>
-            </a:r>
-            <a:endParaRPr lang="en-US" sz="1200" dirty="0"/>
-          </a:p>
-        </p:txBody>
-      </p:sp>
-      <p:sp>
-        <p:nvSpPr>
-          <p:cNvPr id="14" name="Text 12"/>
-          <p:cNvSpPr/>
-          <p:nvPr/>
-        </p:nvSpPr>
-        <p:spPr>
-          <a:xfrm>
-            <a:off x="1115568" y="2907792"/>
-            <a:ext cx="7461504" cy="365760"/>
-          </a:xfrm>
-          <a:prstGeom prst="rect">
-            <a:avLst/>
-          </a:prstGeom>
-          <a:noFill/>
-          <a:ln/>
-        </p:spPr>
-        <p:txBody>
-          <a:bodyPr wrap="square" lIns="0" tIns="0" rIns="0" bIns="0" rtlCol="0" anchor="ctr"/>
-          <a:lstStyle/>
-          <a:p>
-            <a:pPr indent="0" marL="0">
-              <a:buNone/>
-            </a:pPr>
-            <a:r>
-              <a:rPr lang="en-US" sz="1200" dirty="0">
-                <a:solidFill>
-                  <a:srgbClr val="434A63"/>
-                </a:solidFill>
-                <a:latin typeface="Arial" pitchFamily="34" charset="0"/>
-                <a:ea typeface="Arial" pitchFamily="34" charset="-122"/>
-                <a:cs typeface="Arial" pitchFamily="34" charset="-120"/>
-              </a:rPr>
-              <a:t>Die Fangfrage: Wo ist das Netzwerk aus der Datei? Es steht ja gar nicht drin.</a:t>
-            </a:r>
-            <a:endParaRPr lang="en-US" sz="1200" dirty="0"/>
-          </a:p>
-        </p:txBody>
-      </p:sp>
-      <p:sp>
-        <p:nvSpPr>
-          <p:cNvPr id="15" name="Shape 13"/>
-          <p:cNvSpPr/>
-          <p:nvPr/>
-        </p:nvSpPr>
-        <p:spPr>
-          <a:xfrm>
-            <a:off x="438912" y="3273552"/>
-            <a:ext cx="8266176" cy="365760"/>
-          </a:xfrm>
-          <a:prstGeom prst="rect">
-            <a:avLst/>
-          </a:prstGeom>
-          <a:solidFill>
-            <a:srgbClr val="F5F6FC"/>
-          </a:solidFill>
-          <a:ln/>
-        </p:spPr>
-      </p:sp>
-      <p:sp>
-        <p:nvSpPr>
-          <p:cNvPr id="16" name="Text 14"/>
-          <p:cNvSpPr/>
-          <p:nvPr/>
-        </p:nvSpPr>
-        <p:spPr>
-          <a:xfrm>
-            <a:off x="566928" y="3273552"/>
-            <a:ext cx="548640" cy="365760"/>
-          </a:xfrm>
-          <a:prstGeom prst="rect">
-            <a:avLst/>
-          </a:prstGeom>
-          <a:noFill/>
-          <a:ln/>
-        </p:spPr>
-        <p:txBody>
-          <a:bodyPr wrap="square" lIns="0" tIns="0" rIns="0" bIns="0" rtlCol="0" anchor="ctr"/>
-          <a:lstStyle/>
-          <a:p>
-            <a:pPr indent="0" marL="0">
-              <a:buNone/>
-            </a:pPr>
-            <a:r>
-              <a:rPr lang="en-US" sz="1200" b="1" dirty="0">
-                <a:solidFill>
-                  <a:srgbClr val="0F7C86"/>
-                </a:solidFill>
-                <a:latin typeface="Courier New" pitchFamily="34" charset="0"/>
-                <a:ea typeface="Courier New" pitchFamily="34" charset="-122"/>
-                <a:cs typeface="Courier New" pitchFamily="34" charset="-120"/>
-              </a:rPr>
-              <a:t>5</a:t>
-            </a:r>
-            <a:endParaRPr lang="en-US" sz="1200" dirty="0"/>
-          </a:p>
-        </p:txBody>
-      </p:sp>
-      <p:sp>
-        <p:nvSpPr>
-          <p:cNvPr id="17" name="Text 15"/>
-          <p:cNvSpPr/>
-          <p:nvPr/>
-        </p:nvSpPr>
-        <p:spPr>
-          <a:xfrm>
-            <a:off x="1115568" y="3273552"/>
-            <a:ext cx="7461504" cy="365760"/>
-          </a:xfrm>
-          <a:prstGeom prst="rect">
-            <a:avLst/>
-          </a:prstGeom>
-          <a:noFill/>
-          <a:ln/>
-        </p:spPr>
-        <p:txBody>
-          <a:bodyPr wrap="square" lIns="0" tIns="0" rIns="0" bIns="0" rtlCol="0" anchor="ctr"/>
-          <a:lstStyle/>
-          <a:p>
-            <a:pPr indent="0" marL="0">
-              <a:buNone/>
-            </a:pPr>
-            <a:r>
-              <a:rPr lang="en-US" sz="1200" dirty="0">
-                <a:solidFill>
-                  <a:srgbClr val="434A63"/>
-                </a:solidFill>
-                <a:latin typeface="Arial" pitchFamily="34" charset="0"/>
-                <a:ea typeface="Arial" pitchFamily="34" charset="-122"/>
-                <a:cs typeface="Arial" pitchFamily="34" charset="-120"/>
-              </a:rPr>
-              <a:t>Wer im Bonus war: Wie kam der zweite Adminer in den Stack?</a:t>
-            </a:r>
-            <a:endParaRPr lang="en-US" sz="1200" dirty="0"/>
-          </a:p>
-        </p:txBody>
-      </p:sp>
-      <p:sp>
-        <p:nvSpPr>
-          <p:cNvPr id="18" name="Shape 16"/>
-          <p:cNvSpPr/>
-          <p:nvPr/>
-        </p:nvSpPr>
-        <p:spPr>
-          <a:xfrm>
-            <a:off x="566928" y="4069080"/>
-            <a:ext cx="32004" cy="256032"/>
-          </a:xfrm>
-          <a:prstGeom prst="rect">
-            <a:avLst/>
-          </a:prstGeom>
-          <a:solidFill>
-            <a:srgbClr val="0F7C86"/>
-          </a:solidFill>
-          <a:ln/>
-        </p:spPr>
-      </p:sp>
-      <p:sp>
-        <p:nvSpPr>
-          <p:cNvPr id="19" name="Text 17"/>
-          <p:cNvSpPr/>
-          <p:nvPr/>
-        </p:nvSpPr>
-        <p:spPr>
-          <a:xfrm>
-            <a:off x="749808" y="4023360"/>
-            <a:ext cx="7827264" cy="402336"/>
-          </a:xfrm>
-          <a:prstGeom prst="rect">
-            <a:avLst/>
-          </a:prstGeom>
-          <a:noFill/>
-          <a:ln/>
-        </p:spPr>
-        <p:txBody>
-          <a:bodyPr wrap="square" lIns="0" tIns="0" rIns="0" bIns="0" rtlCol="0" anchor="ctr"/>
-          <a:lstStyle/>
-          <a:p>
-            <a:pPr indent="0" marL="0">
-              <a:buNone/>
-            </a:pPr>
-            <a:r>
-              <a:rPr lang="en-US" sz="1200" b="1" dirty="0">
-                <a:solidFill>
-                  <a:srgbClr val="434A63"/>
-                </a:solidFill>
-                <a:latin typeface="Arial" pitchFamily="34" charset="0"/>
-                <a:ea typeface="Arial" pitchFamily="34" charset="-122"/>
-                <a:cs typeface="Arial" pitchFamily="34" charset="-120"/>
-              </a:rPr>
-              <a:t>Antwort auf die Fangfrage: Compose legt für jeden Stack automatisch ein eigenes Netz an, die Services heißen wie ihre Namen.</a:t>
-            </a:r>
-            <a:endParaRPr lang="en-US" sz="1200" dirty="0"/>
-          </a:p>
-        </p:txBody>
-      </p:sp>
-      <p:sp>
-        <p:nvSpPr>
-          <p:cNvPr id="20" name="Shape 18"/>
           <p:cNvSpPr/>
           <p:nvPr/>
         </p:nvSpPr>
@@ -4329,7 +3887,7 @@
       </p:sp>
       <p:sp>
         <p:nvSpPr>
-          <p:cNvPr id="21" name="Text 19"/>
+          <p:cNvPr id="11" name="Text 9"/>
           <p:cNvSpPr/>
           <p:nvPr/>
         </p:nvSpPr>
@@ -4360,7 +3918,7 @@
                 <a:ea typeface="Arial" pitchFamily="34" charset="-122"/>
                 <a:cs typeface="Arial" pitchFamily="34" charset="-120"/>
               </a:rPr>
-              <a:t>Auswertung</a:t>
+              <a:t>Breakout</a:t>
             </a:r>
             <a:endParaRPr lang="en-US" sz="1050" dirty="0"/>
           </a:p>
@@ -4368,7 +3926,7 @@
       </p:sp>
       <p:sp>
         <p:nvSpPr>
-          <p:cNvPr id="22" name="Text 20"/>
+          <p:cNvPr id="12" name="Text 10"/>
           <p:cNvSpPr/>
           <p:nvPr/>
         </p:nvSpPr>
@@ -4399,7 +3957,7 @@
                 <a:ea typeface="Arial" pitchFamily="34" charset="-122"/>
                 <a:cs typeface="Arial" pitchFamily="34" charset="-120"/>
               </a:rPr>
-              <a:t>9/11</a:t>
+              <a:t>9/12</a:t>
             </a:r>
             <a:endParaRPr lang="en-US" sz="1050" dirty="0"/>
           </a:p>
@@ -4490,7 +4048,7 @@
                 <a:ea typeface="Arial" pitchFamily="34" charset="-122"/>
                 <a:cs typeface="Arial" pitchFamily="34" charset="-120"/>
               </a:rPr>
-              <a:t>EINORDNUNG</a:t>
+              <a:t>AUSWERTUNG · 30 MINUTEN</a:t>
             </a:r>
             <a:endParaRPr lang="en-US" sz="1150" dirty="0"/>
           </a:p>
@@ -4529,45 +4087,471 @@
                 <a:ea typeface="Arial" pitchFamily="34" charset="-122"/>
                 <a:cs typeface="Arial" pitchFamily="34" charset="-120"/>
               </a:rPr>
-              <a:t>Wo Compose im Alltag steht</a:t>
+              <a:t>Eure Stacks</a:t>
             </a:r>
             <a:endParaRPr lang="en-US" sz="2600" dirty="0"/>
           </a:p>
         </p:txBody>
       </p:sp>
-      <p:pic>
-        <p:nvPicPr>
-          <p:cNvPr id="5" name="Image 0" descr="/Users/jacobmenge/Desktop/kurs-26.2b-orga/folienwerkstatt/assets/diagramme/compose-einsatz.png">    </p:cNvPr>
-          <p:cNvPicPr>
-            <a:picLocks noChangeAspect="1"/>
-          </p:cNvPicPr>
-          <p:nvPr/>
-        </p:nvPicPr>
-        <p:blipFill>
-          <a:blip r:embed="rId1"/>
-          <a:stretch>
-            <a:fillRect/>
-          </a:stretch>
-        </p:blipFill>
-        <p:spPr>
-          <a:xfrm>
-            <a:off x="566928" y="1444752"/>
-            <a:ext cx="8010144" cy="2432304"/>
-          </a:xfrm>
-          <a:prstGeom prst="rect">
-            <a:avLst/>
-          </a:prstGeom>
-        </p:spPr>
-      </p:pic>
-      <p:sp>
-        <p:nvSpPr>
-          <p:cNvPr id="6" name="Shape 3"/>
-          <p:cNvSpPr/>
-          <p:nvPr/>
-        </p:nvSpPr>
-        <p:spPr>
-          <a:xfrm>
-            <a:off x="566928" y="4087368"/>
+      <p:sp>
+        <p:nvSpPr>
+          <p:cNvPr id="5" name="Shape 3"/>
+          <p:cNvSpPr/>
+          <p:nvPr/>
+        </p:nvSpPr>
+        <p:spPr>
+          <a:xfrm>
+            <a:off x="438912" y="1810512"/>
+            <a:ext cx="8266176" cy="365760"/>
+          </a:xfrm>
+          <a:prstGeom prst="rect">
+            <a:avLst/>
+          </a:prstGeom>
+          <a:solidFill>
+            <a:srgbClr val="F5F6FC"/>
+          </a:solidFill>
+          <a:ln/>
+        </p:spPr>
+      </p:sp>
+      <p:sp>
+        <p:nvSpPr>
+          <p:cNvPr id="6" name="Text 4"/>
+          <p:cNvSpPr/>
+          <p:nvPr/>
+        </p:nvSpPr>
+        <p:spPr>
+          <a:xfrm>
+            <a:off x="566928" y="1810512"/>
+            <a:ext cx="548640" cy="365760"/>
+          </a:xfrm>
+          <a:prstGeom prst="rect">
+            <a:avLst/>
+          </a:prstGeom>
+          <a:noFill/>
+          <a:ln/>
+        </p:spPr>
+        <p:txBody>
+          <a:bodyPr wrap="square" lIns="0" tIns="0" rIns="0" bIns="0" rtlCol="0" anchor="ctr"/>
+          <a:lstStyle/>
+          <a:p>
+            <a:pPr indent="0" marL="0">
+              <a:buNone/>
+            </a:pPr>
+            <a:r>
+              <a:rPr lang="en-US" sz="1200" b="1" dirty="0">
+                <a:solidFill>
+                  <a:srgbClr val="0F7C86"/>
+                </a:solidFill>
+                <a:latin typeface="Courier New" pitchFamily="34" charset="0"/>
+                <a:ea typeface="Courier New" pitchFamily="34" charset="-122"/>
+                <a:cs typeface="Courier New" pitchFamily="34" charset="-120"/>
+              </a:rPr>
+              <a:t>1</a:t>
+            </a:r>
+            <a:endParaRPr lang="en-US" sz="1200" dirty="0"/>
+          </a:p>
+        </p:txBody>
+      </p:sp>
+      <p:sp>
+        <p:nvSpPr>
+          <p:cNvPr id="7" name="Text 5"/>
+          <p:cNvSpPr/>
+          <p:nvPr/>
+        </p:nvSpPr>
+        <p:spPr>
+          <a:xfrm>
+            <a:off x="1115568" y="1810512"/>
+            <a:ext cx="7461504" cy="365760"/>
+          </a:xfrm>
+          <a:prstGeom prst="rect">
+            <a:avLst/>
+          </a:prstGeom>
+          <a:noFill/>
+          <a:ln/>
+        </p:spPr>
+        <p:txBody>
+          <a:bodyPr wrap="square" lIns="0" tIns="0" rIns="0" bIns="0" rtlCol="0" anchor="ctr"/>
+          <a:lstStyle/>
+          <a:p>
+            <a:pPr indent="0" marL="0">
+              <a:buNone/>
+            </a:pPr>
+            <a:r>
+              <a:rPr lang="en-US" sz="1200" dirty="0">
+                <a:solidFill>
+                  <a:srgbClr val="434A63"/>
+                </a:solidFill>
+                <a:latin typeface="Arial" pitchFamily="34" charset="0"/>
+                <a:ea typeface="Arial" pitchFamily="34" charset="-122"/>
+                <a:cs typeface="Arial" pitchFamily="34" charset="-120"/>
+              </a:rPr>
+              <a:t>Eine Gruppe teilt ihre compose.yaml: Wir lesen sie gemeinsam Zeile für Zeile.</a:t>
+            </a:r>
+            <a:endParaRPr lang="en-US" sz="1200" dirty="0"/>
+          </a:p>
+        </p:txBody>
+      </p:sp>
+      <p:sp>
+        <p:nvSpPr>
+          <p:cNvPr id="8" name="Text 6"/>
+          <p:cNvSpPr/>
+          <p:nvPr/>
+        </p:nvSpPr>
+        <p:spPr>
+          <a:xfrm>
+            <a:off x="566928" y="2176272"/>
+            <a:ext cx="548640" cy="365760"/>
+          </a:xfrm>
+          <a:prstGeom prst="rect">
+            <a:avLst/>
+          </a:prstGeom>
+          <a:noFill/>
+          <a:ln/>
+        </p:spPr>
+        <p:txBody>
+          <a:bodyPr wrap="square" lIns="0" tIns="0" rIns="0" bIns="0" rtlCol="0" anchor="ctr"/>
+          <a:lstStyle/>
+          <a:p>
+            <a:pPr indent="0" marL="0">
+              <a:buNone/>
+            </a:pPr>
+            <a:r>
+              <a:rPr lang="en-US" sz="1200" b="1" dirty="0">
+                <a:solidFill>
+                  <a:srgbClr val="0F7C86"/>
+                </a:solidFill>
+                <a:latin typeface="Courier New" pitchFamily="34" charset="0"/>
+                <a:ea typeface="Courier New" pitchFamily="34" charset="-122"/>
+                <a:cs typeface="Courier New" pitchFamily="34" charset="-120"/>
+              </a:rPr>
+              <a:t>2</a:t>
+            </a:r>
+            <a:endParaRPr lang="en-US" sz="1200" dirty="0"/>
+          </a:p>
+        </p:txBody>
+      </p:sp>
+      <p:sp>
+        <p:nvSpPr>
+          <p:cNvPr id="9" name="Text 7"/>
+          <p:cNvSpPr/>
+          <p:nvPr/>
+        </p:nvSpPr>
+        <p:spPr>
+          <a:xfrm>
+            <a:off x="1115568" y="2176272"/>
+            <a:ext cx="7461504" cy="365760"/>
+          </a:xfrm>
+          <a:prstGeom prst="rect">
+            <a:avLst/>
+          </a:prstGeom>
+          <a:noFill/>
+          <a:ln/>
+        </p:spPr>
+        <p:txBody>
+          <a:bodyPr wrap="square" lIns="0" tIns="0" rIns="0" bIns="0" rtlCol="0" anchor="ctr"/>
+          <a:lstStyle/>
+          <a:p>
+            <a:pPr indent="0" marL="0">
+              <a:buNone/>
+            </a:pPr>
+            <a:r>
+              <a:rPr lang="en-US" sz="1200" dirty="0">
+                <a:solidFill>
+                  <a:srgbClr val="434A63"/>
+                </a:solidFill>
+                <a:latin typeface="Arial" pitchFamily="34" charset="0"/>
+                <a:ea typeface="Arial" pitchFamily="34" charset="-122"/>
+                <a:cs typeface="Arial" pitchFamily="34" charset="-120"/>
+              </a:rPr>
+              <a:t>Der Vergleich: Montag eine Handvoll Befehle, heute einer. Was davon steckt jetzt wo?</a:t>
+            </a:r>
+            <a:endParaRPr lang="en-US" sz="1200" dirty="0"/>
+          </a:p>
+        </p:txBody>
+      </p:sp>
+      <p:sp>
+        <p:nvSpPr>
+          <p:cNvPr id="10" name="Shape 8"/>
+          <p:cNvSpPr/>
+          <p:nvPr/>
+        </p:nvSpPr>
+        <p:spPr>
+          <a:xfrm>
+            <a:off x="438912" y="2542032"/>
+            <a:ext cx="8266176" cy="365760"/>
+          </a:xfrm>
+          <a:prstGeom prst="rect">
+            <a:avLst/>
+          </a:prstGeom>
+          <a:solidFill>
+            <a:srgbClr val="F5F6FC"/>
+          </a:solidFill>
+          <a:ln/>
+        </p:spPr>
+      </p:sp>
+      <p:sp>
+        <p:nvSpPr>
+          <p:cNvPr id="11" name="Text 9"/>
+          <p:cNvSpPr/>
+          <p:nvPr/>
+        </p:nvSpPr>
+        <p:spPr>
+          <a:xfrm>
+            <a:off x="566928" y="2542032"/>
+            <a:ext cx="548640" cy="365760"/>
+          </a:xfrm>
+          <a:prstGeom prst="rect">
+            <a:avLst/>
+          </a:prstGeom>
+          <a:noFill/>
+          <a:ln/>
+        </p:spPr>
+        <p:txBody>
+          <a:bodyPr wrap="square" lIns="0" tIns="0" rIns="0" bIns="0" rtlCol="0" anchor="ctr"/>
+          <a:lstStyle/>
+          <a:p>
+            <a:pPr indent="0" marL="0">
+              <a:buNone/>
+            </a:pPr>
+            <a:r>
+              <a:rPr lang="en-US" sz="1200" b="1" dirty="0">
+                <a:solidFill>
+                  <a:srgbClr val="0F7C86"/>
+                </a:solidFill>
+                <a:latin typeface="Courier New" pitchFamily="34" charset="0"/>
+                <a:ea typeface="Courier New" pitchFamily="34" charset="-122"/>
+                <a:cs typeface="Courier New" pitchFamily="34" charset="-120"/>
+              </a:rPr>
+              <a:t>3</a:t>
+            </a:r>
+            <a:endParaRPr lang="en-US" sz="1200" dirty="0"/>
+          </a:p>
+        </p:txBody>
+      </p:sp>
+      <p:sp>
+        <p:nvSpPr>
+          <p:cNvPr id="12" name="Text 10"/>
+          <p:cNvSpPr/>
+          <p:nvPr/>
+        </p:nvSpPr>
+        <p:spPr>
+          <a:xfrm>
+            <a:off x="1115568" y="2542032"/>
+            <a:ext cx="7461504" cy="365760"/>
+          </a:xfrm>
+          <a:prstGeom prst="rect">
+            <a:avLst/>
+          </a:prstGeom>
+          <a:noFill/>
+          <a:ln/>
+        </p:spPr>
+        <p:txBody>
+          <a:bodyPr wrap="square" lIns="0" tIns="0" rIns="0" bIns="0" rtlCol="0" anchor="ctr"/>
+          <a:lstStyle/>
+          <a:p>
+            <a:pPr indent="0" marL="0">
+              <a:buNone/>
+            </a:pPr>
+            <a:r>
+              <a:rPr lang="en-US" sz="1200" dirty="0">
+                <a:solidFill>
+                  <a:srgbClr val="434A63"/>
+                </a:solidFill>
+                <a:latin typeface="Arial" pitchFamily="34" charset="0"/>
+                <a:ea typeface="Arial" pitchFamily="34" charset="-122"/>
+                <a:cs typeface="Arial" pitchFamily="34" charset="-120"/>
+              </a:rPr>
+              <a:t>Härtetest die Zweite: Was hat down überlebt und warum?</a:t>
+            </a:r>
+            <a:endParaRPr lang="en-US" sz="1200" dirty="0"/>
+          </a:p>
+        </p:txBody>
+      </p:sp>
+      <p:sp>
+        <p:nvSpPr>
+          <p:cNvPr id="13" name="Text 11"/>
+          <p:cNvSpPr/>
+          <p:nvPr/>
+        </p:nvSpPr>
+        <p:spPr>
+          <a:xfrm>
+            <a:off x="566928" y="2907792"/>
+            <a:ext cx="548640" cy="365760"/>
+          </a:xfrm>
+          <a:prstGeom prst="rect">
+            <a:avLst/>
+          </a:prstGeom>
+          <a:noFill/>
+          <a:ln/>
+        </p:spPr>
+        <p:txBody>
+          <a:bodyPr wrap="square" lIns="0" tIns="0" rIns="0" bIns="0" rtlCol="0" anchor="ctr"/>
+          <a:lstStyle/>
+          <a:p>
+            <a:pPr indent="0" marL="0">
+              <a:buNone/>
+            </a:pPr>
+            <a:r>
+              <a:rPr lang="en-US" sz="1200" b="1" dirty="0">
+                <a:solidFill>
+                  <a:srgbClr val="0F7C86"/>
+                </a:solidFill>
+                <a:latin typeface="Courier New" pitchFamily="34" charset="0"/>
+                <a:ea typeface="Courier New" pitchFamily="34" charset="-122"/>
+                <a:cs typeface="Courier New" pitchFamily="34" charset="-120"/>
+              </a:rPr>
+              <a:t>4</a:t>
+            </a:r>
+            <a:endParaRPr lang="en-US" sz="1200" dirty="0"/>
+          </a:p>
+        </p:txBody>
+      </p:sp>
+      <p:sp>
+        <p:nvSpPr>
+          <p:cNvPr id="14" name="Text 12"/>
+          <p:cNvSpPr/>
+          <p:nvPr/>
+        </p:nvSpPr>
+        <p:spPr>
+          <a:xfrm>
+            <a:off x="1115568" y="2907792"/>
+            <a:ext cx="7461504" cy="365760"/>
+          </a:xfrm>
+          <a:prstGeom prst="rect">
+            <a:avLst/>
+          </a:prstGeom>
+          <a:noFill/>
+          <a:ln/>
+        </p:spPr>
+        <p:txBody>
+          <a:bodyPr wrap="square" lIns="0" tIns="0" rIns="0" bIns="0" rtlCol="0" anchor="ctr"/>
+          <a:lstStyle/>
+          <a:p>
+            <a:pPr indent="0" marL="0">
+              <a:buNone/>
+            </a:pPr>
+            <a:r>
+              <a:rPr lang="en-US" sz="1200" dirty="0">
+                <a:solidFill>
+                  <a:srgbClr val="434A63"/>
+                </a:solidFill>
+                <a:latin typeface="Arial" pitchFamily="34" charset="0"/>
+                <a:ea typeface="Arial" pitchFamily="34" charset="-122"/>
+                <a:cs typeface="Arial" pitchFamily="34" charset="-120"/>
+              </a:rPr>
+              <a:t>Die Fangfrage: Wo ist das Netzwerk aus der Datei? Es steht ja gar nicht drin.</a:t>
+            </a:r>
+            <a:endParaRPr lang="en-US" sz="1200" dirty="0"/>
+          </a:p>
+        </p:txBody>
+      </p:sp>
+      <p:sp>
+        <p:nvSpPr>
+          <p:cNvPr id="15" name="Shape 13"/>
+          <p:cNvSpPr/>
+          <p:nvPr/>
+        </p:nvSpPr>
+        <p:spPr>
+          <a:xfrm>
+            <a:off x="438912" y="3273552"/>
+            <a:ext cx="8266176" cy="365760"/>
+          </a:xfrm>
+          <a:prstGeom prst="rect">
+            <a:avLst/>
+          </a:prstGeom>
+          <a:solidFill>
+            <a:srgbClr val="F5F6FC"/>
+          </a:solidFill>
+          <a:ln/>
+        </p:spPr>
+      </p:sp>
+      <p:sp>
+        <p:nvSpPr>
+          <p:cNvPr id="16" name="Text 14"/>
+          <p:cNvSpPr/>
+          <p:nvPr/>
+        </p:nvSpPr>
+        <p:spPr>
+          <a:xfrm>
+            <a:off x="566928" y="3273552"/>
+            <a:ext cx="548640" cy="365760"/>
+          </a:xfrm>
+          <a:prstGeom prst="rect">
+            <a:avLst/>
+          </a:prstGeom>
+          <a:noFill/>
+          <a:ln/>
+        </p:spPr>
+        <p:txBody>
+          <a:bodyPr wrap="square" lIns="0" tIns="0" rIns="0" bIns="0" rtlCol="0" anchor="ctr"/>
+          <a:lstStyle/>
+          <a:p>
+            <a:pPr indent="0" marL="0">
+              <a:buNone/>
+            </a:pPr>
+            <a:r>
+              <a:rPr lang="en-US" sz="1200" b="1" dirty="0">
+                <a:solidFill>
+                  <a:srgbClr val="0F7C86"/>
+                </a:solidFill>
+                <a:latin typeface="Courier New" pitchFamily="34" charset="0"/>
+                <a:ea typeface="Courier New" pitchFamily="34" charset="-122"/>
+                <a:cs typeface="Courier New" pitchFamily="34" charset="-120"/>
+              </a:rPr>
+              <a:t>5</a:t>
+            </a:r>
+            <a:endParaRPr lang="en-US" sz="1200" dirty="0"/>
+          </a:p>
+        </p:txBody>
+      </p:sp>
+      <p:sp>
+        <p:nvSpPr>
+          <p:cNvPr id="17" name="Text 15"/>
+          <p:cNvSpPr/>
+          <p:nvPr/>
+        </p:nvSpPr>
+        <p:spPr>
+          <a:xfrm>
+            <a:off x="1115568" y="3273552"/>
+            <a:ext cx="7461504" cy="365760"/>
+          </a:xfrm>
+          <a:prstGeom prst="rect">
+            <a:avLst/>
+          </a:prstGeom>
+          <a:noFill/>
+          <a:ln/>
+        </p:spPr>
+        <p:txBody>
+          <a:bodyPr wrap="square" lIns="0" tIns="0" rIns="0" bIns="0" rtlCol="0" anchor="ctr"/>
+          <a:lstStyle/>
+          <a:p>
+            <a:pPr indent="0" marL="0">
+              <a:buNone/>
+            </a:pPr>
+            <a:r>
+              <a:rPr lang="en-US" sz="1200" dirty="0">
+                <a:solidFill>
+                  <a:srgbClr val="434A63"/>
+                </a:solidFill>
+                <a:latin typeface="Arial" pitchFamily="34" charset="0"/>
+                <a:ea typeface="Arial" pitchFamily="34" charset="-122"/>
+                <a:cs typeface="Arial" pitchFamily="34" charset="-120"/>
+              </a:rPr>
+              <a:t>Wer im Bonus war: Wie kam der zweite Adminer in den Stack?</a:t>
+            </a:r>
+            <a:endParaRPr lang="en-US" sz="1200" dirty="0"/>
+          </a:p>
+        </p:txBody>
+      </p:sp>
+      <p:sp>
+        <p:nvSpPr>
+          <p:cNvPr id="18" name="Shape 16"/>
+          <p:cNvSpPr/>
+          <p:nvPr/>
+        </p:nvSpPr>
+        <p:spPr>
+          <a:xfrm>
+            <a:off x="566928" y="4069080"/>
             <a:ext cx="32004" cy="256032"/>
           </a:xfrm>
           <a:prstGeom prst="rect">
@@ -4581,13 +4565,13 @@
       </p:sp>
       <p:sp>
         <p:nvSpPr>
-          <p:cNvPr id="7" name="Text 4"/>
-          <p:cNvSpPr/>
-          <p:nvPr/>
-        </p:nvSpPr>
-        <p:spPr>
-          <a:xfrm>
-            <a:off x="749808" y="4041648"/>
+          <p:cNvPr id="19" name="Text 17"/>
+          <p:cNvSpPr/>
+          <p:nvPr/>
+        </p:nvSpPr>
+        <p:spPr>
+          <a:xfrm>
+            <a:off x="749808" y="4023360"/>
             <a:ext cx="7827264" cy="402336"/>
           </a:xfrm>
           <a:prstGeom prst="rect">
@@ -4612,7 +4596,7 @@
                 <a:ea typeface="Arial" pitchFamily="34" charset="-122"/>
                 <a:cs typeface="Arial" pitchFamily="34" charset="-120"/>
               </a:rPr>
-              <a:t>Merksatz des Abends: Die Datei ist der Stack. Wer die compose.yaml hat, hat die ganze Umgebung.</a:t>
+              <a:t>Antwort auf die Fangfrage: Compose legt für jeden Stack automatisch ein eigenes Netz an. Dort ist jeder Service unter seinem Namen erreichbar.</a:t>
             </a:r>
             <a:endParaRPr lang="en-US" sz="1200" dirty="0"/>
           </a:p>
@@ -4620,7 +4604,7 @@
       </p:sp>
       <p:sp>
         <p:nvSpPr>
-          <p:cNvPr id="8" name="Shape 5"/>
+          <p:cNvPr id="20" name="Shape 18"/>
           <p:cNvSpPr/>
           <p:nvPr/>
         </p:nvSpPr>
@@ -4643,7 +4627,7 @@
       </p:sp>
       <p:sp>
         <p:nvSpPr>
-          <p:cNvPr id="9" name="Text 6"/>
+          <p:cNvPr id="21" name="Text 19"/>
           <p:cNvSpPr/>
           <p:nvPr/>
         </p:nvSpPr>
@@ -4682,7 +4666,7 @@
       </p:sp>
       <p:sp>
         <p:nvSpPr>
-          <p:cNvPr id="10" name="Text 7"/>
+          <p:cNvPr id="22" name="Text 20"/>
           <p:cNvSpPr/>
           <p:nvPr/>
         </p:nvSpPr>
@@ -4713,7 +4697,7 @@
                 <a:ea typeface="Arial" pitchFamily="34" charset="-122"/>
                 <a:cs typeface="Arial" pitchFamily="34" charset="-120"/>
               </a:rPr>
-              <a:t>10/11</a:t>
+              <a:t>10/12</a:t>
             </a:r>
             <a:endParaRPr lang="en-US" sz="1050" dirty="0"/>
           </a:p>
@@ -4804,7 +4788,7 @@
                 <a:ea typeface="Arial" pitchFamily="34" charset="-122"/>
                 <a:cs typeface="Arial" pitchFamily="34" charset="-120"/>
               </a:rPr>
-              <a:t>AUSBLICK</a:t>
+              <a:t>EINORDNUNG</a:t>
             </a:r>
             <a:endParaRPr lang="en-US" sz="1150" dirty="0"/>
           </a:p>
@@ -4843,81 +4827,46 @@
                 <a:ea typeface="Arial" pitchFamily="34" charset="-122"/>
                 <a:cs typeface="Arial" pitchFamily="34" charset="-120"/>
               </a:rPr>
-              <a:t>Bis Montag</a:t>
+              <a:t>Wo Compose im Alltag steht</a:t>
             </a:r>
             <a:endParaRPr lang="en-US" sz="2600" dirty="0"/>
           </a:p>
         </p:txBody>
       </p:sp>
-      <p:sp>
-        <p:nvSpPr>
-          <p:cNvPr id="5" name="Text 3"/>
-          <p:cNvSpPr/>
-          <p:nvPr/>
-        </p:nvSpPr>
+      <p:pic>
+        <p:nvPicPr>
+          <p:cNvPr id="5" name="Image 0" descr="/Users/jacobmenge/Desktop/kurs-26.2b-orga/folienwerkstatt/assets/diagramme/compose-einsatz.png">    </p:cNvPr>
+          <p:cNvPicPr>
+            <a:picLocks noChangeAspect="1"/>
+          </p:cNvPicPr>
+          <p:nvPr/>
+        </p:nvPicPr>
+        <p:blipFill>
+          <a:blip r:embed="rId1"/>
+          <a:stretch>
+            <a:fillRect/>
+          </a:stretch>
+        </p:blipFill>
         <p:spPr>
           <a:xfrm>
             <a:off x="566928" y="1444752"/>
-            <a:ext cx="8010144" cy="438912"/>
-          </a:xfrm>
-          <a:prstGeom prst="rect">
-            <a:avLst/>
-          </a:prstGeom>
-          <a:noFill/>
-          <a:ln/>
-        </p:spPr>
-        <p:txBody>
-          <a:bodyPr wrap="square" lIns="0" tIns="0" rIns="0" bIns="0" rtlCol="0" anchor="t"/>
-          <a:lstStyle/>
-          <a:p>
-            <a:pPr indent="0" marL="0">
-              <a:buNone/>
-            </a:pPr>
-            <a:r>
-              <a:rPr lang="en-US" sz="1300" dirty="0">
-                <a:solidFill>
-                  <a:srgbClr val="5C6377"/>
-                </a:solidFill>
-                <a:latin typeface="Arial" pitchFamily="34" charset="0"/>
-                <a:ea typeface="Arial" pitchFamily="34" charset="-122"/>
-                <a:cs typeface="Arial" pitchFamily="34" charset="-120"/>
-              </a:rPr>
-              <a:t>Montag gibt es keine neue Theorie. Montag wird gespielt, mit allem, was ihr jetzt könnt.</a:t>
-            </a:r>
-            <a:endParaRPr lang="en-US" sz="1300" dirty="0"/>
-          </a:p>
-        </p:txBody>
-      </p:sp>
-      <p:sp>
-        <p:nvSpPr>
-          <p:cNvPr id="6" name="Shape 4"/>
-          <p:cNvSpPr/>
-          <p:nvPr/>
-        </p:nvSpPr>
-        <p:spPr>
-          <a:xfrm>
-            <a:off x="566928" y="1975104"/>
-            <a:ext cx="2523744" cy="1920240"/>
-          </a:xfrm>
-          <a:prstGeom prst="rect">
-            <a:avLst/>
-          </a:prstGeom>
-          <a:solidFill>
-            <a:srgbClr val="F5F6FC"/>
-          </a:solidFill>
-          <a:ln/>
-        </p:spPr>
-      </p:sp>
-      <p:sp>
-        <p:nvSpPr>
-          <p:cNvPr id="7" name="Shape 5"/>
-          <p:cNvSpPr/>
-          <p:nvPr/>
-        </p:nvSpPr>
-        <p:spPr>
-          <a:xfrm>
-            <a:off x="566928" y="1975104"/>
-            <a:ext cx="41148" cy="1920240"/>
+            <a:ext cx="8010144" cy="2432304"/>
+          </a:xfrm>
+          <a:prstGeom prst="rect">
+            <a:avLst/>
+          </a:prstGeom>
+        </p:spPr>
+      </p:pic>
+      <p:sp>
+        <p:nvSpPr>
+          <p:cNvPr id="6" name="Shape 3"/>
+          <p:cNvSpPr/>
+          <p:nvPr/>
+        </p:nvSpPr>
+        <p:spPr>
+          <a:xfrm>
+            <a:off x="566928" y="4087368"/>
+            <a:ext cx="32004" cy="256032"/>
           </a:xfrm>
           <a:prstGeom prst="rect">
             <a:avLst/>
@@ -4930,72 +4879,30 @@
       </p:sp>
       <p:sp>
         <p:nvSpPr>
-          <p:cNvPr id="8" name="Text 6"/>
-          <p:cNvSpPr/>
-          <p:nvPr/>
-        </p:nvSpPr>
-        <p:spPr>
-          <a:xfrm>
-            <a:off x="804672" y="2121408"/>
-            <a:ext cx="2121408" cy="256032"/>
-          </a:xfrm>
-          <a:prstGeom prst="rect">
-            <a:avLst/>
-          </a:prstGeom>
-          <a:noFill/>
-          <a:ln/>
-        </p:spPr>
-        <p:txBody>
-          <a:bodyPr wrap="square" lIns="0" tIns="0" rIns="0" bIns="0" rtlCol="0" anchor="t"/>
-          <a:lstStyle/>
-          <a:p>
-            <a:pPr indent="0" marL="0">
-              <a:buNone/>
-            </a:pPr>
-            <a:r>
-              <a:rPr lang="en-US" sz="1300" b="1" dirty="0">
-                <a:solidFill>
-                  <a:srgbClr val="272E52"/>
-                </a:solidFill>
-                <a:latin typeface="Arial" pitchFamily="34" charset="0"/>
-                <a:ea typeface="Arial" pitchFamily="34" charset="-122"/>
-                <a:cs typeface="Arial" pitchFamily="34" charset="-120"/>
-              </a:rPr>
-              <a:t>Gruppen-Event</a:t>
-            </a:r>
-            <a:endParaRPr lang="en-US" sz="1300" dirty="0"/>
-          </a:p>
-        </p:txBody>
-      </p:sp>
-      <p:sp>
-        <p:nvSpPr>
-          <p:cNvPr id="9" name="Text 7"/>
-          <p:cNvSpPr/>
-          <p:nvPr/>
-        </p:nvSpPr>
-        <p:spPr>
-          <a:xfrm>
-            <a:off x="804672" y="2423160"/>
-            <a:ext cx="2121408" cy="1353312"/>
-          </a:xfrm>
-          <a:prstGeom prst="rect">
-            <a:avLst/>
-          </a:prstGeom>
-          <a:noFill/>
-          <a:ln/>
-        </p:spPr>
-        <p:txBody>
-          <a:bodyPr wrap="square" lIns="0" tIns="0" rIns="0" bIns="0" rtlCol="0" anchor="t"/>
-          <a:lstStyle/>
-          <a:p>
-            <a:pPr indent="0" marL="0">
-              <a:lnSpc>
-                <a:spcPct val="92000"/>
-              </a:lnSpc>
-              <a:buNone/>
-            </a:pPr>
-            <a:r>
-              <a:rPr lang="en-US" sz="1150" dirty="0">
+          <p:cNvPr id="7" name="Text 4"/>
+          <p:cNvSpPr/>
+          <p:nvPr/>
+        </p:nvSpPr>
+        <p:spPr>
+          <a:xfrm>
+            <a:off x="749808" y="4041648"/>
+            <a:ext cx="7827264" cy="402336"/>
+          </a:xfrm>
+          <a:prstGeom prst="rect">
+            <a:avLst/>
+          </a:prstGeom>
+          <a:noFill/>
+          <a:ln/>
+        </p:spPr>
+        <p:txBody>
+          <a:bodyPr wrap="square" lIns="0" tIns="0" rIns="0" bIns="0" rtlCol="0" anchor="ctr"/>
+          <a:lstStyle/>
+          <a:p>
+            <a:pPr indent="0" marL="0">
+              <a:buNone/>
+            </a:pPr>
+            <a:r>
+              <a:rPr lang="en-US" sz="1200" b="1" dirty="0">
                 <a:solidFill>
                   <a:srgbClr val="434A63"/>
                 </a:solidFill>
@@ -5003,308 +4910,7 @@
                 <a:ea typeface="Arial" pitchFamily="34" charset="-122"/>
                 <a:cs typeface="Arial" pitchFamily="34" charset="-120"/>
               </a:rPr>
-              <a:t>Escape Room oder Mission Control: Ihr löst im Team Aufgaben rund um Container, auf Zeit.</a:t>
-            </a:r>
-            <a:endParaRPr lang="en-US" sz="1150" dirty="0"/>
-          </a:p>
-        </p:txBody>
-      </p:sp>
-      <p:sp>
-        <p:nvSpPr>
-          <p:cNvPr id="10" name="Shape 8"/>
-          <p:cNvSpPr/>
-          <p:nvPr/>
-        </p:nvSpPr>
-        <p:spPr>
-          <a:xfrm>
-            <a:off x="3310128" y="1975104"/>
-            <a:ext cx="2523744" cy="1920240"/>
-          </a:xfrm>
-          <a:prstGeom prst="rect">
-            <a:avLst/>
-          </a:prstGeom>
-          <a:solidFill>
-            <a:srgbClr val="F5F6FC"/>
-          </a:solidFill>
-          <a:ln/>
-        </p:spPr>
-      </p:sp>
-      <p:sp>
-        <p:nvSpPr>
-          <p:cNvPr id="11" name="Shape 9"/>
-          <p:cNvSpPr/>
-          <p:nvPr/>
-        </p:nvSpPr>
-        <p:spPr>
-          <a:xfrm>
-            <a:off x="3310128" y="1975104"/>
-            <a:ext cx="41148" cy="1920240"/>
-          </a:xfrm>
-          <a:prstGeom prst="rect">
-            <a:avLst/>
-          </a:prstGeom>
-          <a:solidFill>
-            <a:srgbClr val="0F7C86"/>
-          </a:solidFill>
-          <a:ln/>
-        </p:spPr>
-      </p:sp>
-      <p:sp>
-        <p:nvSpPr>
-          <p:cNvPr id="12" name="Text 10"/>
-          <p:cNvSpPr/>
-          <p:nvPr/>
-        </p:nvSpPr>
-        <p:spPr>
-          <a:xfrm>
-            <a:off x="3547872" y="2121408"/>
-            <a:ext cx="2121408" cy="256032"/>
-          </a:xfrm>
-          <a:prstGeom prst="rect">
-            <a:avLst/>
-          </a:prstGeom>
-          <a:noFill/>
-          <a:ln/>
-        </p:spPr>
-        <p:txBody>
-          <a:bodyPr wrap="square" lIns="0" tIns="0" rIns="0" bIns="0" rtlCol="0" anchor="t"/>
-          <a:lstStyle/>
-          <a:p>
-            <a:pPr indent="0" marL="0">
-              <a:buNone/>
-            </a:pPr>
-            <a:r>
-              <a:rPr lang="en-US" sz="1300" b="1" dirty="0">
-                <a:solidFill>
-                  <a:srgbClr val="272E52"/>
-                </a:solidFill>
-                <a:latin typeface="Arial" pitchFamily="34" charset="0"/>
-                <a:ea typeface="Arial" pitchFamily="34" charset="-122"/>
-                <a:cs typeface="Arial" pitchFamily="34" charset="-120"/>
-              </a:rPr>
-              <a:t>Euer Werkzeugkasten</a:t>
-            </a:r>
-            <a:endParaRPr lang="en-US" sz="1300" dirty="0"/>
-          </a:p>
-        </p:txBody>
-      </p:sp>
-      <p:sp>
-        <p:nvSpPr>
-          <p:cNvPr id="13" name="Text 11"/>
-          <p:cNvSpPr/>
-          <p:nvPr/>
-        </p:nvSpPr>
-        <p:spPr>
-          <a:xfrm>
-            <a:off x="3547872" y="2423160"/>
-            <a:ext cx="2121408" cy="1353312"/>
-          </a:xfrm>
-          <a:prstGeom prst="rect">
-            <a:avLst/>
-          </a:prstGeom>
-          <a:noFill/>
-          <a:ln/>
-        </p:spPr>
-        <p:txBody>
-          <a:bodyPr wrap="square" lIns="0" tIns="0" rIns="0" bIns="0" rtlCol="0" anchor="t"/>
-          <a:lstStyle/>
-          <a:p>
-            <a:pPr indent="0" marL="0">
-              <a:lnSpc>
-                <a:spcPct val="92000"/>
-              </a:lnSpc>
-              <a:buNone/>
-            </a:pPr>
-            <a:r>
-              <a:rPr lang="en-US" sz="1150" dirty="0">
-                <a:solidFill>
-                  <a:srgbClr val="434A63"/>
-                </a:solidFill>
-                <a:latin typeface="Arial" pitchFamily="34" charset="0"/>
-                <a:ea typeface="Arial" pitchFamily="34" charset="-122"/>
-                <a:cs typeface="Arial" pitchFamily="34" charset="-120"/>
-              </a:rPr>
-              <a:t>Alles aus den letzten drei Abenden kommt vor: run, Volumes, Netze, Compose.</a:t>
-            </a:r>
-            <a:endParaRPr lang="en-US" sz="1150" dirty="0"/>
-          </a:p>
-        </p:txBody>
-      </p:sp>
-      <p:sp>
-        <p:nvSpPr>
-          <p:cNvPr id="14" name="Shape 12"/>
-          <p:cNvSpPr/>
-          <p:nvPr/>
-        </p:nvSpPr>
-        <p:spPr>
-          <a:xfrm>
-            <a:off x="6053328" y="1975104"/>
-            <a:ext cx="2523744" cy="1920240"/>
-          </a:xfrm>
-          <a:prstGeom prst="rect">
-            <a:avLst/>
-          </a:prstGeom>
-          <a:solidFill>
-            <a:srgbClr val="F5F6FC"/>
-          </a:solidFill>
-          <a:ln/>
-        </p:spPr>
-      </p:sp>
-      <p:sp>
-        <p:nvSpPr>
-          <p:cNvPr id="15" name="Shape 13"/>
-          <p:cNvSpPr/>
-          <p:nvPr/>
-        </p:nvSpPr>
-        <p:spPr>
-          <a:xfrm>
-            <a:off x="6053328" y="1975104"/>
-            <a:ext cx="41148" cy="1920240"/>
-          </a:xfrm>
-          <a:prstGeom prst="rect">
-            <a:avLst/>
-          </a:prstGeom>
-          <a:solidFill>
-            <a:srgbClr val="0F7C86"/>
-          </a:solidFill>
-          <a:ln/>
-        </p:spPr>
-      </p:sp>
-      <p:sp>
-        <p:nvSpPr>
-          <p:cNvPr id="16" name="Text 14"/>
-          <p:cNvSpPr/>
-          <p:nvPr/>
-        </p:nvSpPr>
-        <p:spPr>
-          <a:xfrm>
-            <a:off x="6291072" y="2121408"/>
-            <a:ext cx="2121408" cy="256032"/>
-          </a:xfrm>
-          <a:prstGeom prst="rect">
-            <a:avLst/>
-          </a:prstGeom>
-          <a:noFill/>
-          <a:ln/>
-        </p:spPr>
-        <p:txBody>
-          <a:bodyPr wrap="square" lIns="0" tIns="0" rIns="0" bIns="0" rtlCol="0" anchor="t"/>
-          <a:lstStyle/>
-          <a:p>
-            <a:pPr indent="0" marL="0">
-              <a:buNone/>
-            </a:pPr>
-            <a:r>
-              <a:rPr lang="en-US" sz="1300" b="1" dirty="0">
-                <a:solidFill>
-                  <a:srgbClr val="272E52"/>
-                </a:solidFill>
-                <a:latin typeface="Arial" pitchFamily="34" charset="0"/>
-                <a:ea typeface="Arial" pitchFamily="34" charset="-122"/>
-                <a:cs typeface="Arial" pitchFamily="34" charset="-120"/>
-              </a:rPr>
-              <a:t>Nichts vorbereiten</a:t>
-            </a:r>
-            <a:endParaRPr lang="en-US" sz="1300" dirty="0"/>
-          </a:p>
-        </p:txBody>
-      </p:sp>
-      <p:sp>
-        <p:nvSpPr>
-          <p:cNvPr id="17" name="Text 15"/>
-          <p:cNvSpPr/>
-          <p:nvPr/>
-        </p:nvSpPr>
-        <p:spPr>
-          <a:xfrm>
-            <a:off x="6291072" y="2423160"/>
-            <a:ext cx="2121408" cy="1353312"/>
-          </a:xfrm>
-          <a:prstGeom prst="rect">
-            <a:avLst/>
-          </a:prstGeom>
-          <a:noFill/>
-          <a:ln/>
-        </p:spPr>
-        <p:txBody>
-          <a:bodyPr wrap="square" lIns="0" tIns="0" rIns="0" bIns="0" rtlCol="0" anchor="t"/>
-          <a:lstStyle/>
-          <a:p>
-            <a:pPr indent="0" marL="0">
-              <a:lnSpc>
-                <a:spcPct val="92000"/>
-              </a:lnSpc>
-              <a:buNone/>
-            </a:pPr>
-            <a:r>
-              <a:rPr lang="en-US" sz="1150" dirty="0">
-                <a:solidFill>
-                  <a:srgbClr val="434A63"/>
-                </a:solidFill>
-                <a:latin typeface="Arial" pitchFamily="34" charset="0"/>
-                <a:ea typeface="Arial" pitchFamily="34" charset="-122"/>
-                <a:cs typeface="Arial" pitchFamily="34" charset="-120"/>
-              </a:rPr>
-              <a:t>Docker läuft und gute Laune reicht. Punkte gibt es für Teamarbeit, nicht für Tempo.</a:t>
-            </a:r>
-            <a:endParaRPr lang="en-US" sz="1150" dirty="0"/>
-          </a:p>
-        </p:txBody>
-      </p:sp>
-      <p:sp>
-        <p:nvSpPr>
-          <p:cNvPr id="18" name="Shape 16"/>
-          <p:cNvSpPr/>
-          <p:nvPr/>
-        </p:nvSpPr>
-        <p:spPr>
-          <a:xfrm>
-            <a:off x="566928" y="4160520"/>
-            <a:ext cx="32004" cy="256032"/>
-          </a:xfrm>
-          <a:prstGeom prst="rect">
-            <a:avLst/>
-          </a:prstGeom>
-          <a:solidFill>
-            <a:srgbClr val="0F7C86"/>
-          </a:solidFill>
-          <a:ln/>
-        </p:spPr>
-      </p:sp>
-      <p:sp>
-        <p:nvSpPr>
-          <p:cNvPr id="19" name="Text 17"/>
-          <p:cNvSpPr/>
-          <p:nvPr/>
-        </p:nvSpPr>
-        <p:spPr>
-          <a:xfrm>
-            <a:off x="749808" y="4114800"/>
-            <a:ext cx="7827264" cy="402336"/>
-          </a:xfrm>
-          <a:prstGeom prst="rect">
-            <a:avLst/>
-          </a:prstGeom>
-          <a:noFill/>
-          <a:ln/>
-        </p:spPr>
-        <p:txBody>
-          <a:bodyPr wrap="square" lIns="0" tIns="0" rIns="0" bIns="0" rtlCol="0" anchor="ctr"/>
-          <a:lstStyle/>
-          <a:p>
-            <a:pPr indent="0" marL="0">
-              <a:buNone/>
-            </a:pPr>
-            <a:r>
-              <a:rPr lang="en-US" sz="1200" b="1" dirty="0">
-                <a:solidFill>
-                  <a:srgbClr val="434A63"/>
-                </a:solidFill>
-                <a:latin typeface="Arial" pitchFamily="34" charset="0"/>
-                <a:ea typeface="Arial" pitchFamily="34" charset="-122"/>
-                <a:cs typeface="Arial" pitchFamily="34" charset="-120"/>
-              </a:rPr>
-              <a:t>Nächster Termin: Montag, 21. September um 18:00 Uhr, das Gruppen-Event.</a:t>
+              <a:t>Merksatz des Abends: Die Datei ist der Stack. Wer die compose.yaml hat, hat die ganze Umgebung.</a:t>
             </a:r>
             <a:endParaRPr lang="en-US" sz="1200" dirty="0"/>
           </a:p>
@@ -5312,7 +4918,7 @@
       </p:sp>
       <p:sp>
         <p:nvSpPr>
-          <p:cNvPr id="20" name="Shape 18"/>
+          <p:cNvPr id="8" name="Shape 5"/>
           <p:cNvSpPr/>
           <p:nvPr/>
         </p:nvSpPr>
@@ -5335,7 +4941,7 @@
       </p:sp>
       <p:sp>
         <p:nvSpPr>
-          <p:cNvPr id="21" name="Text 19"/>
+          <p:cNvPr id="9" name="Text 6"/>
           <p:cNvSpPr/>
           <p:nvPr/>
         </p:nvSpPr>
@@ -5366,7 +4972,7 @@
                 <a:ea typeface="Arial" pitchFamily="34" charset="-122"/>
                 <a:cs typeface="Arial" pitchFamily="34" charset="-120"/>
               </a:rPr>
-              <a:t>Abschluss</a:t>
+              <a:t>Auswertung</a:t>
             </a:r>
             <a:endParaRPr lang="en-US" sz="1050" dirty="0"/>
           </a:p>
@@ -5374,7 +4980,7 @@
       </p:sp>
       <p:sp>
         <p:nvSpPr>
-          <p:cNvPr id="22" name="Text 20"/>
+          <p:cNvPr id="10" name="Text 7"/>
           <p:cNvSpPr/>
           <p:nvPr/>
         </p:nvSpPr>
@@ -5405,7 +5011,7 @@
                 <a:ea typeface="Arial" pitchFamily="34" charset="-122"/>
                 <a:cs typeface="Arial" pitchFamily="34" charset="-120"/>
               </a:rPr>
-              <a:t>11/11</a:t>
+              <a:t>11/12</a:t>
             </a:r>
             <a:endParaRPr lang="en-US" sz="1050" dirty="0"/>
           </a:p>
@@ -5422,6 +5028,698 @@
 <file path=ppt/slides/slide15.xml><?xml version="1.0" encoding="utf-8"?>
 <p:sld xmlns:a="http://schemas.openxmlformats.org/drawingml/2006/main" xmlns:r="http://schemas.openxmlformats.org/officeDocument/2006/relationships" xmlns:p="http://schemas.openxmlformats.org/presentationml/2006/main">
   <p:cSld name="Slide 15">
+    <p:bg>
+      <p:bgPr>
+        <a:solidFill>
+          <a:srgbClr val="FFFFFF"/>
+        </a:solidFill>
+      </p:bgPr>
+    </p:bg>
+    <p:spTree>
+      <p:nvGrpSpPr>
+        <p:cNvPr id="1" name=""/>
+        <p:cNvGrpSpPr/>
+        <p:nvPr/>
+      </p:nvGrpSpPr>
+      <p:grpSpPr>
+        <a:xfrm>
+          <a:off x="0" y="0"/>
+          <a:ext cx="0" cy="0"/>
+          <a:chOff x="0" y="0"/>
+          <a:chExt cx="0" cy="0"/>
+        </a:xfrm>
+      </p:grpSpPr>
+      <p:sp>
+        <p:nvSpPr>
+          <p:cNvPr id="2" name="Shape 0"/>
+          <p:cNvSpPr/>
+          <p:nvPr/>
+        </p:nvSpPr>
+        <p:spPr>
+          <a:xfrm>
+            <a:off x="566928" y="201168"/>
+            <a:ext cx="475488" cy="50292"/>
+          </a:xfrm>
+          <a:prstGeom prst="rect">
+            <a:avLst/>
+          </a:prstGeom>
+          <a:solidFill>
+            <a:srgbClr val="0F7C86"/>
+          </a:solidFill>
+          <a:ln/>
+        </p:spPr>
+      </p:sp>
+      <p:sp>
+        <p:nvSpPr>
+          <p:cNvPr id="3" name="Text 1"/>
+          <p:cNvSpPr/>
+          <p:nvPr/>
+        </p:nvSpPr>
+        <p:spPr>
+          <a:xfrm>
+            <a:off x="566928" y="384048"/>
+            <a:ext cx="8010144" cy="237744"/>
+          </a:xfrm>
+          <a:prstGeom prst="rect">
+            <a:avLst/>
+          </a:prstGeom>
+          <a:noFill/>
+          <a:ln/>
+        </p:spPr>
+        <p:txBody>
+          <a:bodyPr wrap="square" lIns="0" tIns="0" rIns="0" bIns="0" rtlCol="0" anchor="ctr"/>
+          <a:lstStyle/>
+          <a:p>
+            <a:pPr indent="0" marL="0">
+              <a:buNone/>
+            </a:pPr>
+            <a:r>
+              <a:rPr lang="en-US" sz="1150" b="1" spc="180" kern="0" dirty="0">
+                <a:solidFill>
+                  <a:srgbClr val="0F7C86"/>
+                </a:solidFill>
+                <a:latin typeface="Arial" pitchFamily="34" charset="0"/>
+                <a:ea typeface="Arial" pitchFamily="34" charset="-122"/>
+                <a:cs typeface="Arial" pitchFamily="34" charset="-120"/>
+              </a:rPr>
+              <a:t>AUSBLICK</a:t>
+            </a:r>
+            <a:endParaRPr lang="en-US" sz="1150" dirty="0"/>
+          </a:p>
+        </p:txBody>
+      </p:sp>
+      <p:sp>
+        <p:nvSpPr>
+          <p:cNvPr id="4" name="Text 2"/>
+          <p:cNvSpPr/>
+          <p:nvPr/>
+        </p:nvSpPr>
+        <p:spPr>
+          <a:xfrm>
+            <a:off x="566928" y="731520"/>
+            <a:ext cx="8010144" cy="603504"/>
+          </a:xfrm>
+          <a:prstGeom prst="rect">
+            <a:avLst/>
+          </a:prstGeom>
+          <a:noFill/>
+          <a:ln/>
+        </p:spPr>
+        <p:txBody>
+          <a:bodyPr wrap="square" lIns="0" tIns="0" rIns="0" bIns="0" rtlCol="0" anchor="t"/>
+          <a:lstStyle/>
+          <a:p>
+            <a:pPr indent="0" marL="0">
+              <a:buNone/>
+            </a:pPr>
+            <a:r>
+              <a:rPr lang="en-US" sz="2600" b="1" dirty="0">
+                <a:solidFill>
+                  <a:srgbClr val="272E52"/>
+                </a:solidFill>
+                <a:latin typeface="Arial" pitchFamily="34" charset="0"/>
+                <a:ea typeface="Arial" pitchFamily="34" charset="-122"/>
+                <a:cs typeface="Arial" pitchFamily="34" charset="-120"/>
+              </a:rPr>
+              <a:t>Bis Montag</a:t>
+            </a:r>
+            <a:endParaRPr lang="en-US" sz="2600" dirty="0"/>
+          </a:p>
+        </p:txBody>
+      </p:sp>
+      <p:sp>
+        <p:nvSpPr>
+          <p:cNvPr id="5" name="Text 3"/>
+          <p:cNvSpPr/>
+          <p:nvPr/>
+        </p:nvSpPr>
+        <p:spPr>
+          <a:xfrm>
+            <a:off x="566928" y="1444752"/>
+            <a:ext cx="8010144" cy="438912"/>
+          </a:xfrm>
+          <a:prstGeom prst="rect">
+            <a:avLst/>
+          </a:prstGeom>
+          <a:noFill/>
+          <a:ln/>
+        </p:spPr>
+        <p:txBody>
+          <a:bodyPr wrap="square" lIns="0" tIns="0" rIns="0" bIns="0" rtlCol="0" anchor="t"/>
+          <a:lstStyle/>
+          <a:p>
+            <a:pPr indent="0" marL="0">
+              <a:buNone/>
+            </a:pPr>
+            <a:r>
+              <a:rPr lang="en-US" sz="1300" dirty="0">
+                <a:solidFill>
+                  <a:srgbClr val="5C6377"/>
+                </a:solidFill>
+                <a:latin typeface="Arial" pitchFamily="34" charset="0"/>
+                <a:ea typeface="Arial" pitchFamily="34" charset="-122"/>
+                <a:cs typeface="Arial" pitchFamily="34" charset="-120"/>
+              </a:rPr>
+              <a:t>Montag gibt es keine neue Theorie. Montag wird gespielt, mit allem, was ihr jetzt könnt.</a:t>
+            </a:r>
+            <a:endParaRPr lang="en-US" sz="1300" dirty="0"/>
+          </a:p>
+        </p:txBody>
+      </p:sp>
+      <p:sp>
+        <p:nvSpPr>
+          <p:cNvPr id="6" name="Shape 4"/>
+          <p:cNvSpPr/>
+          <p:nvPr/>
+        </p:nvSpPr>
+        <p:spPr>
+          <a:xfrm>
+            <a:off x="566928" y="1975104"/>
+            <a:ext cx="2523744" cy="1920240"/>
+          </a:xfrm>
+          <a:prstGeom prst="rect">
+            <a:avLst/>
+          </a:prstGeom>
+          <a:solidFill>
+            <a:srgbClr val="F5F6FC"/>
+          </a:solidFill>
+          <a:ln/>
+        </p:spPr>
+      </p:sp>
+      <p:sp>
+        <p:nvSpPr>
+          <p:cNvPr id="7" name="Shape 5"/>
+          <p:cNvSpPr/>
+          <p:nvPr/>
+        </p:nvSpPr>
+        <p:spPr>
+          <a:xfrm>
+            <a:off x="566928" y="1975104"/>
+            <a:ext cx="41148" cy="1920240"/>
+          </a:xfrm>
+          <a:prstGeom prst="rect">
+            <a:avLst/>
+          </a:prstGeom>
+          <a:solidFill>
+            <a:srgbClr val="0F7C86"/>
+          </a:solidFill>
+          <a:ln/>
+        </p:spPr>
+      </p:sp>
+      <p:sp>
+        <p:nvSpPr>
+          <p:cNvPr id="8" name="Text 6"/>
+          <p:cNvSpPr/>
+          <p:nvPr/>
+        </p:nvSpPr>
+        <p:spPr>
+          <a:xfrm>
+            <a:off x="804672" y="2121408"/>
+            <a:ext cx="2121408" cy="256032"/>
+          </a:xfrm>
+          <a:prstGeom prst="rect">
+            <a:avLst/>
+          </a:prstGeom>
+          <a:noFill/>
+          <a:ln/>
+        </p:spPr>
+        <p:txBody>
+          <a:bodyPr wrap="square" lIns="0" tIns="0" rIns="0" bIns="0" rtlCol="0" anchor="t"/>
+          <a:lstStyle/>
+          <a:p>
+            <a:pPr indent="0" marL="0">
+              <a:buNone/>
+            </a:pPr>
+            <a:r>
+              <a:rPr lang="en-US" sz="1300" b="1" dirty="0">
+                <a:solidFill>
+                  <a:srgbClr val="272E52"/>
+                </a:solidFill>
+                <a:latin typeface="Arial" pitchFamily="34" charset="0"/>
+                <a:ea typeface="Arial" pitchFamily="34" charset="-122"/>
+                <a:cs typeface="Arial" pitchFamily="34" charset="-120"/>
+              </a:rPr>
+              <a:t>Mission Control</a:t>
+            </a:r>
+            <a:endParaRPr lang="en-US" sz="1300" dirty="0"/>
+          </a:p>
+        </p:txBody>
+      </p:sp>
+      <p:sp>
+        <p:nvSpPr>
+          <p:cNvPr id="9" name="Text 7"/>
+          <p:cNvSpPr/>
+          <p:nvPr/>
+        </p:nvSpPr>
+        <p:spPr>
+          <a:xfrm>
+            <a:off x="804672" y="2423160"/>
+            <a:ext cx="2121408" cy="1353312"/>
+          </a:xfrm>
+          <a:prstGeom prst="rect">
+            <a:avLst/>
+          </a:prstGeom>
+          <a:noFill/>
+          <a:ln/>
+        </p:spPr>
+        <p:txBody>
+          <a:bodyPr wrap="square" lIns="0" tIns="0" rIns="0" bIns="0" rtlCol="0" anchor="t"/>
+          <a:lstStyle/>
+          <a:p>
+            <a:pPr indent="0" marL="0">
+              <a:lnSpc>
+                <a:spcPct val="92000"/>
+              </a:lnSpc>
+              <a:buNone/>
+            </a:pPr>
+            <a:r>
+              <a:rPr lang="en-US" sz="1150" dirty="0">
+                <a:solidFill>
+                  <a:srgbClr val="434A63"/>
+                </a:solidFill>
+                <a:latin typeface="Arial" pitchFamily="34" charset="0"/>
+                <a:ea typeface="Arial" pitchFamily="34" charset="-122"/>
+                <a:cs typeface="Arial" pitchFamily="34" charset="-120"/>
+              </a:rPr>
+              <a:t>Als DevOps-Team der Bodenstation bringt ihr einen Stack aus vier Diensten zurück ins Leben.</a:t>
+            </a:r>
+            <a:endParaRPr lang="en-US" sz="1150" dirty="0"/>
+          </a:p>
+        </p:txBody>
+      </p:sp>
+      <p:sp>
+        <p:nvSpPr>
+          <p:cNvPr id="10" name="Shape 8"/>
+          <p:cNvSpPr/>
+          <p:nvPr/>
+        </p:nvSpPr>
+        <p:spPr>
+          <a:xfrm>
+            <a:off x="3310128" y="1975104"/>
+            <a:ext cx="2523744" cy="1920240"/>
+          </a:xfrm>
+          <a:prstGeom prst="rect">
+            <a:avLst/>
+          </a:prstGeom>
+          <a:solidFill>
+            <a:srgbClr val="F5F6FC"/>
+          </a:solidFill>
+          <a:ln/>
+        </p:spPr>
+      </p:sp>
+      <p:sp>
+        <p:nvSpPr>
+          <p:cNvPr id="11" name="Shape 9"/>
+          <p:cNvSpPr/>
+          <p:nvPr/>
+        </p:nvSpPr>
+        <p:spPr>
+          <a:xfrm>
+            <a:off x="3310128" y="1975104"/>
+            <a:ext cx="41148" cy="1920240"/>
+          </a:xfrm>
+          <a:prstGeom prst="rect">
+            <a:avLst/>
+          </a:prstGeom>
+          <a:solidFill>
+            <a:srgbClr val="0F7C86"/>
+          </a:solidFill>
+          <a:ln/>
+        </p:spPr>
+      </p:sp>
+      <p:sp>
+        <p:nvSpPr>
+          <p:cNvPr id="12" name="Text 10"/>
+          <p:cNvSpPr/>
+          <p:nvPr/>
+        </p:nvSpPr>
+        <p:spPr>
+          <a:xfrm>
+            <a:off x="3547872" y="2121408"/>
+            <a:ext cx="2121408" cy="256032"/>
+          </a:xfrm>
+          <a:prstGeom prst="rect">
+            <a:avLst/>
+          </a:prstGeom>
+          <a:noFill/>
+          <a:ln/>
+        </p:spPr>
+        <p:txBody>
+          <a:bodyPr wrap="square" lIns="0" tIns="0" rIns="0" bIns="0" rtlCol="0" anchor="t"/>
+          <a:lstStyle/>
+          <a:p>
+            <a:pPr indent="0" marL="0">
+              <a:buNone/>
+            </a:pPr>
+            <a:r>
+              <a:rPr lang="en-US" sz="1300" b="1" dirty="0">
+                <a:solidFill>
+                  <a:srgbClr val="272E52"/>
+                </a:solidFill>
+                <a:latin typeface="Arial" pitchFamily="34" charset="0"/>
+                <a:ea typeface="Arial" pitchFamily="34" charset="-122"/>
+                <a:cs typeface="Arial" pitchFamily="34" charset="-120"/>
+              </a:rPr>
+              <a:t>Euer Werkzeugkasten</a:t>
+            </a:r>
+            <a:endParaRPr lang="en-US" sz="1300" dirty="0"/>
+          </a:p>
+        </p:txBody>
+      </p:sp>
+      <p:sp>
+        <p:nvSpPr>
+          <p:cNvPr id="13" name="Text 11"/>
+          <p:cNvSpPr/>
+          <p:nvPr/>
+        </p:nvSpPr>
+        <p:spPr>
+          <a:xfrm>
+            <a:off x="3547872" y="2423160"/>
+            <a:ext cx="2121408" cy="1353312"/>
+          </a:xfrm>
+          <a:prstGeom prst="rect">
+            <a:avLst/>
+          </a:prstGeom>
+          <a:noFill/>
+          <a:ln/>
+        </p:spPr>
+        <p:txBody>
+          <a:bodyPr wrap="square" lIns="0" tIns="0" rIns="0" bIns="0" rtlCol="0" anchor="t"/>
+          <a:lstStyle/>
+          <a:p>
+            <a:pPr indent="0" marL="0">
+              <a:lnSpc>
+                <a:spcPct val="92000"/>
+              </a:lnSpc>
+              <a:buNone/>
+            </a:pPr>
+            <a:r>
+              <a:rPr lang="en-US" sz="1150" dirty="0">
+                <a:solidFill>
+                  <a:srgbClr val="434A63"/>
+                </a:solidFill>
+                <a:latin typeface="Arial" pitchFamily="34" charset="0"/>
+                <a:ea typeface="Arial" pitchFamily="34" charset="-122"/>
+                <a:cs typeface="Arial" pitchFamily="34" charset="-120"/>
+              </a:rPr>
+              <a:t>Alles aus den letzten drei Abenden kommt vor: run, Volumes, Netze, Compose.</a:t>
+            </a:r>
+            <a:endParaRPr lang="en-US" sz="1150" dirty="0"/>
+          </a:p>
+        </p:txBody>
+      </p:sp>
+      <p:sp>
+        <p:nvSpPr>
+          <p:cNvPr id="14" name="Shape 12"/>
+          <p:cNvSpPr/>
+          <p:nvPr/>
+        </p:nvSpPr>
+        <p:spPr>
+          <a:xfrm>
+            <a:off x="6053328" y="1975104"/>
+            <a:ext cx="2523744" cy="1920240"/>
+          </a:xfrm>
+          <a:prstGeom prst="rect">
+            <a:avLst/>
+          </a:prstGeom>
+          <a:solidFill>
+            <a:srgbClr val="F5F6FC"/>
+          </a:solidFill>
+          <a:ln/>
+        </p:spPr>
+      </p:sp>
+      <p:sp>
+        <p:nvSpPr>
+          <p:cNvPr id="15" name="Shape 13"/>
+          <p:cNvSpPr/>
+          <p:nvPr/>
+        </p:nvSpPr>
+        <p:spPr>
+          <a:xfrm>
+            <a:off x="6053328" y="1975104"/>
+            <a:ext cx="41148" cy="1920240"/>
+          </a:xfrm>
+          <a:prstGeom prst="rect">
+            <a:avLst/>
+          </a:prstGeom>
+          <a:solidFill>
+            <a:srgbClr val="0F7C86"/>
+          </a:solidFill>
+          <a:ln/>
+        </p:spPr>
+      </p:sp>
+      <p:sp>
+        <p:nvSpPr>
+          <p:cNvPr id="16" name="Text 14"/>
+          <p:cNvSpPr/>
+          <p:nvPr/>
+        </p:nvSpPr>
+        <p:spPr>
+          <a:xfrm>
+            <a:off x="6291072" y="2121408"/>
+            <a:ext cx="2121408" cy="256032"/>
+          </a:xfrm>
+          <a:prstGeom prst="rect">
+            <a:avLst/>
+          </a:prstGeom>
+          <a:noFill/>
+          <a:ln/>
+        </p:spPr>
+        <p:txBody>
+          <a:bodyPr wrap="square" lIns="0" tIns="0" rIns="0" bIns="0" rtlCol="0" anchor="t"/>
+          <a:lstStyle/>
+          <a:p>
+            <a:pPr indent="0" marL="0">
+              <a:buNone/>
+            </a:pPr>
+            <a:r>
+              <a:rPr lang="en-US" sz="1300" b="1" dirty="0">
+                <a:solidFill>
+                  <a:srgbClr val="272E52"/>
+                </a:solidFill>
+                <a:latin typeface="Arial" pitchFamily="34" charset="0"/>
+                <a:ea typeface="Arial" pitchFamily="34" charset="-122"/>
+                <a:cs typeface="Arial" pitchFamily="34" charset="-120"/>
+              </a:rPr>
+              <a:t>Nichts vorbereiten</a:t>
+            </a:r>
+            <a:endParaRPr lang="en-US" sz="1300" dirty="0"/>
+          </a:p>
+        </p:txBody>
+      </p:sp>
+      <p:sp>
+        <p:nvSpPr>
+          <p:cNvPr id="17" name="Text 15"/>
+          <p:cNvSpPr/>
+          <p:nvPr/>
+        </p:nvSpPr>
+        <p:spPr>
+          <a:xfrm>
+            <a:off x="6291072" y="2423160"/>
+            <a:ext cx="2121408" cy="1353312"/>
+          </a:xfrm>
+          <a:prstGeom prst="rect">
+            <a:avLst/>
+          </a:prstGeom>
+          <a:noFill/>
+          <a:ln/>
+        </p:spPr>
+        <p:txBody>
+          <a:bodyPr wrap="square" lIns="0" tIns="0" rIns="0" bIns="0" rtlCol="0" anchor="t"/>
+          <a:lstStyle/>
+          <a:p>
+            <a:pPr indent="0" marL="0">
+              <a:lnSpc>
+                <a:spcPct val="92000"/>
+              </a:lnSpc>
+              <a:buNone/>
+            </a:pPr>
+            <a:r>
+              <a:rPr lang="en-US" sz="1150" dirty="0">
+                <a:solidFill>
+                  <a:srgbClr val="434A63"/>
+                </a:solidFill>
+                <a:latin typeface="Arial" pitchFamily="34" charset="0"/>
+                <a:ea typeface="Arial" pitchFamily="34" charset="-122"/>
+                <a:cs typeface="Arial" pitchFamily="34" charset="-120"/>
+              </a:rPr>
+              <a:t>Docker läuft und gute Laune reicht. Punkte gibt es für Teamarbeit, nicht für Tempo.</a:t>
+            </a:r>
+            <a:endParaRPr lang="en-US" sz="1150" dirty="0"/>
+          </a:p>
+        </p:txBody>
+      </p:sp>
+      <p:sp>
+        <p:nvSpPr>
+          <p:cNvPr id="18" name="Shape 16"/>
+          <p:cNvSpPr/>
+          <p:nvPr/>
+        </p:nvSpPr>
+        <p:spPr>
+          <a:xfrm>
+            <a:off x="566928" y="4160520"/>
+            <a:ext cx="32004" cy="256032"/>
+          </a:xfrm>
+          <a:prstGeom prst="rect">
+            <a:avLst/>
+          </a:prstGeom>
+          <a:solidFill>
+            <a:srgbClr val="0F7C86"/>
+          </a:solidFill>
+          <a:ln/>
+        </p:spPr>
+      </p:sp>
+      <p:sp>
+        <p:nvSpPr>
+          <p:cNvPr id="19" name="Text 17"/>
+          <p:cNvSpPr/>
+          <p:nvPr/>
+        </p:nvSpPr>
+        <p:spPr>
+          <a:xfrm>
+            <a:off x="749808" y="4114800"/>
+            <a:ext cx="7827264" cy="402336"/>
+          </a:xfrm>
+          <a:prstGeom prst="rect">
+            <a:avLst/>
+          </a:prstGeom>
+          <a:noFill/>
+          <a:ln/>
+        </p:spPr>
+        <p:txBody>
+          <a:bodyPr wrap="square" lIns="0" tIns="0" rIns="0" bIns="0" rtlCol="0" anchor="ctr"/>
+          <a:lstStyle/>
+          <a:p>
+            <a:pPr indent="0" marL="0">
+              <a:buNone/>
+            </a:pPr>
+            <a:r>
+              <a:rPr lang="en-US" sz="1200" b="1" dirty="0">
+                <a:solidFill>
+                  <a:srgbClr val="434A63"/>
+                </a:solidFill>
+                <a:latin typeface="Arial" pitchFamily="34" charset="0"/>
+                <a:ea typeface="Arial" pitchFamily="34" charset="-122"/>
+                <a:cs typeface="Arial" pitchFamily="34" charset="-120"/>
+              </a:rPr>
+              <a:t>Nächster Termin: Montag, 21. September um 18:00 Uhr: Docker Praxis, das Gruppen-Event.</a:t>
+            </a:r>
+            <a:endParaRPr lang="en-US" sz="1200" dirty="0"/>
+          </a:p>
+        </p:txBody>
+      </p:sp>
+      <p:sp>
+        <p:nvSpPr>
+          <p:cNvPr id="20" name="Shape 18"/>
+          <p:cNvSpPr/>
+          <p:nvPr/>
+        </p:nvSpPr>
+        <p:spPr>
+          <a:xfrm>
+            <a:off x="566928" y="4631436"/>
+            <a:ext cx="8010144" cy="0"/>
+          </a:xfrm>
+          <a:prstGeom prst="line">
+            <a:avLst/>
+          </a:prstGeom>
+          <a:noFill/>
+          <a:ln w="9525">
+            <a:solidFill>
+              <a:srgbClr val="DFE3F0"/>
+            </a:solidFill>
+            <a:prstDash val="solid"/>
+          </a:ln>
+        </p:spPr>
+      </p:sp>
+      <p:sp>
+        <p:nvSpPr>
+          <p:cNvPr id="21" name="Text 19"/>
+          <p:cNvSpPr/>
+          <p:nvPr/>
+        </p:nvSpPr>
+        <p:spPr>
+          <a:xfrm>
+            <a:off x="566928" y="4722876"/>
+            <a:ext cx="5029200" cy="237744"/>
+          </a:xfrm>
+          <a:prstGeom prst="rect">
+            <a:avLst/>
+          </a:prstGeom>
+          <a:noFill/>
+          <a:ln/>
+        </p:spPr>
+        <p:txBody>
+          <a:bodyPr wrap="square" lIns="0" tIns="0" rIns="0" bIns="0" rtlCol="0" anchor="ctr"/>
+          <a:lstStyle/>
+          <a:p>
+            <a:pPr indent="0" marL="0">
+              <a:buNone/>
+            </a:pPr>
+            <a:r>
+              <a:rPr lang="en-US" sz="1050" spc="30" kern="0" dirty="0">
+                <a:solidFill>
+                  <a:srgbClr val="5C6377"/>
+                </a:solidFill>
+                <a:latin typeface="Arial" pitchFamily="34" charset="0"/>
+                <a:ea typeface="Arial" pitchFamily="34" charset="-122"/>
+                <a:cs typeface="Arial" pitchFamily="34" charset="-120"/>
+              </a:rPr>
+              <a:t>Abschluss</a:t>
+            </a:r>
+            <a:endParaRPr lang="en-US" sz="1050" dirty="0"/>
+          </a:p>
+        </p:txBody>
+      </p:sp>
+      <p:sp>
+        <p:nvSpPr>
+          <p:cNvPr id="22" name="Text 20"/>
+          <p:cNvSpPr/>
+          <p:nvPr/>
+        </p:nvSpPr>
+        <p:spPr>
+          <a:xfrm>
+            <a:off x="8028432" y="4722876"/>
+            <a:ext cx="548640" cy="237744"/>
+          </a:xfrm>
+          <a:prstGeom prst="rect">
+            <a:avLst/>
+          </a:prstGeom>
+          <a:noFill/>
+          <a:ln/>
+        </p:spPr>
+        <p:txBody>
+          <a:bodyPr wrap="square" lIns="0" tIns="0" rIns="0" bIns="0" rtlCol="0" anchor="ctr"/>
+          <a:lstStyle/>
+          <a:p>
+            <a:pPr algn="r" indent="0" marL="0">
+              <a:buNone/>
+            </a:pPr>
+            <a:r>
+              <a:rPr lang="en-US" sz="1050" dirty="0">
+                <a:solidFill>
+                  <a:srgbClr val="5C6377"/>
+                </a:solidFill>
+                <a:latin typeface="Arial" pitchFamily="34" charset="0"/>
+                <a:ea typeface="Arial" pitchFamily="34" charset="-122"/>
+                <a:cs typeface="Arial" pitchFamily="34" charset="-120"/>
+              </a:rPr>
+              <a:t>12/12</a:t>
+            </a:r>
+            <a:endParaRPr lang="en-US" sz="1050" dirty="0"/>
+          </a:p>
+        </p:txBody>
+      </p:sp>
+    </p:spTree>
+  </p:cSld>
+  <p:clrMapOvr>
+    <a:masterClrMapping/>
+  </p:clrMapOvr>
+</p:sld>
+</file>
+
+<file path=ppt/slides/slide16.xml><?xml version="1.0" encoding="utf-8"?>
+<p:sld xmlns:a="http://schemas.openxmlformats.org/drawingml/2006/main" xmlns:r="http://schemas.openxmlformats.org/officeDocument/2006/relationships" xmlns:p="http://schemas.openxmlformats.org/presentationml/2006/main">
+  <p:cSld name="Slide 16">
     <p:bg>
       <p:bgPr>
         <a:solidFill>
@@ -5574,7 +5872,7 @@
                 <a:ea typeface="Arial" pitchFamily="34" charset="-122"/>
                 <a:cs typeface="Arial" pitchFamily="34" charset="-120"/>
               </a:rPr>
-              <a:t>Montag, 21. September · Gruppen-Event</a:t>
+              <a:t>Montag, 21. September · Docker Praxis</a:t>
             </a:r>
             <a:endParaRPr lang="en-US" sz="1600" dirty="0"/>
           </a:p>
@@ -6744,7 +7042,7 @@
                 <a:ea typeface="Arial" pitchFamily="34" charset="-122"/>
                 <a:cs typeface="Arial" pitchFamily="34" charset="-120"/>
               </a:rPr>
-              <a:t>1/11</a:t>
+              <a:t>1/12</a:t>
             </a:r>
             <a:endParaRPr lang="en-US" sz="1050" dirty="0"/>
           </a:p>
@@ -7107,7 +7405,7 @@
                 <a:ea typeface="Arial" pitchFamily="34" charset="-122"/>
                 <a:cs typeface="Arial" pitchFamily="34" charset="-120"/>
               </a:rPr>
-              <a:t>2/11</a:t>
+              <a:t>2/12</a:t>
             </a:r>
             <a:endParaRPr lang="en-US" sz="1050" dirty="0"/>
           </a:p>
@@ -7421,7 +7719,7 @@
                 <a:ea typeface="Arial" pitchFamily="34" charset="-122"/>
                 <a:cs typeface="Arial" pitchFamily="34" charset="-120"/>
               </a:rPr>
-              <a:t>3/11</a:t>
+              <a:t>3/12</a:t>
             </a:r>
             <a:endParaRPr lang="en-US" sz="1050" dirty="0"/>
           </a:p>
@@ -7843,7 +8141,7 @@
                 <a:ea typeface="Arial" pitchFamily="34" charset="-122"/>
                 <a:cs typeface="Arial" pitchFamily="34" charset="-120"/>
               </a:rPr>
-              <a:t>YAML ist ein Textformat für Struktur per Einrückung, gut lesbar für Menschen. Genau eine Regel: Leerzeichen, niemals Tabs.</a:t>
+              <a:t>Das Dateiformat heißt YAML: ein Textformat, das Struktur allein über Einrückung zeigt und für Menschen gut lesbar bleibt.</a:t>
             </a:r>
             <a:endParaRPr lang="en-US" sz="1200" dirty="0"/>
           </a:p>
@@ -7944,7 +8242,7 @@
                 <a:ea typeface="Arial" pitchFamily="34" charset="-122"/>
                 <a:cs typeface="Arial" pitchFamily="34" charset="-120"/>
               </a:rPr>
-              <a:t>4/11</a:t>
+              <a:t>4/12</a:t>
             </a:r>
             <a:endParaRPr lang="en-US" sz="1050" dirty="0"/>
           </a:p>
@@ -8035,7 +8333,7 @@
                 <a:ea typeface="Arial" pitchFamily="34" charset="-122"/>
                 <a:cs typeface="Arial" pitchFamily="34" charset="-120"/>
               </a:rPr>
-              <a:t>DIE COMPOSE.YAML</a:t>
+              <a:t>LEERZEICHEN, NIEMALS TABS</a:t>
             </a:r>
             <a:endParaRPr lang="en-US" sz="1150" dirty="0"/>
           </a:p>
@@ -8074,7 +8372,7 @@
                 <a:ea typeface="Arial" pitchFamily="34" charset="-122"/>
                 <a:cs typeface="Arial" pitchFamily="34" charset="-120"/>
               </a:rPr>
-              <a:t>Jede Zeile kennt ihr schon</a:t>
+              <a:t>Die eine YAML-Regel</a:t>
             </a:r>
             <a:endParaRPr lang="en-US" sz="2600" dirty="0"/>
           </a:p>
@@ -8082,7 +8380,7 @@
       </p:sp>
       <p:pic>
         <p:nvPicPr>
-          <p:cNvPr id="5" name="Image 0" descr="/Users/jacobmenge/Desktop/kurs-26.2b-orga/folienwerkstatt/assets/diagramme/compose-datei.png">    </p:cNvPr>
+          <p:cNvPr id="5" name="Image 0" descr="/Users/jacobmenge/Desktop/kurs-26.2b-orga/folienwerkstatt/assets/diagramme/yaml-regel.png">    </p:cNvPr>
           <p:cNvPicPr>
             <a:picLocks noChangeAspect="1"/>
           </p:cNvPicPr>
@@ -8096,8 +8394,8 @@
         </p:blipFill>
         <p:spPr>
           <a:xfrm>
-            <a:off x="566928" y="1426464"/>
-            <a:ext cx="8010144" cy="2505456"/>
+            <a:off x="566928" y="1499616"/>
+            <a:ext cx="8010144" cy="2249424"/>
           </a:xfrm>
           <a:prstGeom prst="rect">
             <a:avLst/>
@@ -8112,7 +8410,7 @@
         </p:nvSpPr>
         <p:spPr>
           <a:xfrm>
-            <a:off x="566928" y="4123944"/>
+            <a:off x="566928" y="4069080"/>
             <a:ext cx="32004" cy="256032"/>
           </a:xfrm>
           <a:prstGeom prst="rect">
@@ -8132,7 +8430,7 @@
         </p:nvSpPr>
         <p:spPr>
           <a:xfrm>
-            <a:off x="749808" y="4078224"/>
+            <a:off x="749808" y="4023360"/>
             <a:ext cx="7827264" cy="402336"/>
           </a:xfrm>
           <a:prstGeom prst="rect">
@@ -8157,7 +8455,7 @@
                 <a:ea typeface="Arial" pitchFamily="34" charset="-122"/>
                 <a:cs typeface="Arial" pitchFamily="34" charset="-120"/>
               </a:rPr>
-              <a:t>Nichts hier ist neu: Es sind die Montags-Flags, nur aufgeschrieben statt getippt. Das Netz legt Compose ganz von selbst an.</a:t>
+              <a:t>Merkt euch diese Fehlermeldung. Wer sie in der Übung sieht, prüft zuerst die Einrückung und gewinnt zehn Minuten Fehlersuche zurück.</a:t>
             </a:r>
             <a:endParaRPr lang="en-US" sz="1200" dirty="0"/>
           </a:p>
@@ -8258,7 +8556,7 @@
                 <a:ea typeface="Arial" pitchFamily="34" charset="-122"/>
                 <a:cs typeface="Arial" pitchFamily="34" charset="-120"/>
               </a:rPr>
-              <a:t>5/11</a:t>
+              <a:t>5/12</a:t>
             </a:r>
             <a:endParaRPr lang="en-US" sz="1050" dirty="0"/>
           </a:p>
@@ -8349,7 +8647,7 @@
                 <a:ea typeface="Arial" pitchFamily="34" charset="-122"/>
                 <a:cs typeface="Arial" pitchFamily="34" charset="-120"/>
               </a:rPr>
-              <a:t>DER LEBENSZYKLUS</a:t>
+              <a:t>DIE COMPOSE.YAML</a:t>
             </a:r>
             <a:endParaRPr lang="en-US" sz="1150" dirty="0"/>
           </a:p>
@@ -8388,7 +8686,7 @@
                 <a:ea typeface="Arial" pitchFamily="34" charset="-122"/>
                 <a:cs typeface="Arial" pitchFamily="34" charset="-120"/>
               </a:rPr>
-              <a:t>Ein Befehl hoch, ein Befehl runter</a:t>
+              <a:t>Jede Zeile kennt ihr schon</a:t>
             </a:r>
             <a:endParaRPr lang="en-US" sz="2600" dirty="0"/>
           </a:p>
@@ -8396,7 +8694,7 @@
       </p:sp>
       <p:pic>
         <p:nvPicPr>
-          <p:cNvPr id="5" name="Image 0" descr="/Users/jacobmenge/Desktop/kurs-26.2b-orga/folienwerkstatt/assets/diagramme/compose-leben.png">    </p:cNvPr>
+          <p:cNvPr id="5" name="Image 0" descr="/Users/jacobmenge/Desktop/kurs-26.2b-orga/folienwerkstatt/assets/diagramme/compose-datei.png">    </p:cNvPr>
           <p:cNvPicPr>
             <a:picLocks noChangeAspect="1"/>
           </p:cNvPicPr>
@@ -8410,8 +8708,8 @@
         </p:blipFill>
         <p:spPr>
           <a:xfrm>
-            <a:off x="566928" y="1499616"/>
-            <a:ext cx="8010144" cy="2249424"/>
+            <a:off x="566928" y="1426464"/>
+            <a:ext cx="8010144" cy="2505456"/>
           </a:xfrm>
           <a:prstGeom prst="rect">
             <a:avLst/>
@@ -8426,7 +8724,7 @@
         </p:nvSpPr>
         <p:spPr>
           <a:xfrm>
-            <a:off x="566928" y="4069080"/>
+            <a:off x="566928" y="4123944"/>
             <a:ext cx="32004" cy="256032"/>
           </a:xfrm>
           <a:prstGeom prst="rect">
@@ -8446,7 +8744,7 @@
         </p:nvSpPr>
         <p:spPr>
           <a:xfrm>
-            <a:off x="749808" y="4023360"/>
+            <a:off x="749808" y="4078224"/>
             <a:ext cx="7827264" cy="402336"/>
           </a:xfrm>
           <a:prstGeom prst="rect">
@@ -8471,7 +8769,7 @@
                 <a:ea typeface="Arial" pitchFamily="34" charset="-122"/>
                 <a:cs typeface="Arial" pitchFamily="34" charset="-120"/>
               </a:rPr>
-              <a:t>Das -v von down -v ist die bewusste Entscheidung, auch die Daten zu löschen. Ohne -v überlebt euer Volume jeden down.</a:t>
+              <a:t>Nichts hier ist neu: Es sind die Montags-Flags, nur aufgeschrieben statt getippt. Das Netz legt Compose ganz von selbst an.</a:t>
             </a:r>
             <a:endParaRPr lang="en-US" sz="1200" dirty="0"/>
           </a:p>
@@ -8572,7 +8870,7 @@
                 <a:ea typeface="Arial" pitchFamily="34" charset="-122"/>
                 <a:cs typeface="Arial" pitchFamily="34" charset="-120"/>
               </a:rPr>
-              <a:t>6/11</a:t>
+              <a:t>6/12</a:t>
             </a:r>
             <a:endParaRPr lang="en-US" sz="1050" dirty="0"/>
           </a:p>
@@ -8618,48 +8916,150 @@
         </p:nvSpPr>
         <p:spPr>
           <a:xfrm>
-            <a:off x="6355080" y="0"/>
-            <a:ext cx="2788920" cy="5143500"/>
+            <a:off x="566928" y="201168"/>
+            <a:ext cx="475488" cy="50292"/>
           </a:xfrm>
           <a:prstGeom prst="rect">
             <a:avLst/>
           </a:prstGeom>
           <a:solidFill>
-            <a:srgbClr val="FBF2E3"/>
+            <a:srgbClr val="0F7C86"/>
           </a:solidFill>
           <a:ln/>
         </p:spPr>
       </p:sp>
       <p:sp>
         <p:nvSpPr>
-          <p:cNvPr id="3" name="Shape 1"/>
-          <p:cNvSpPr/>
-          <p:nvPr/>
-        </p:nvSpPr>
-        <p:spPr>
-          <a:xfrm>
-            <a:off x="6355080" y="0"/>
-            <a:ext cx="45720" cy="5143500"/>
+          <p:cNvPr id="3" name="Text 1"/>
+          <p:cNvSpPr/>
+          <p:nvPr/>
+        </p:nvSpPr>
+        <p:spPr>
+          <a:xfrm>
+            <a:off x="566928" y="384048"/>
+            <a:ext cx="8010144" cy="237744"/>
+          </a:xfrm>
+          <a:prstGeom prst="rect">
+            <a:avLst/>
+          </a:prstGeom>
+          <a:noFill/>
+          <a:ln/>
+        </p:spPr>
+        <p:txBody>
+          <a:bodyPr wrap="square" lIns="0" tIns="0" rIns="0" bIns="0" rtlCol="0" anchor="ctr"/>
+          <a:lstStyle/>
+          <a:p>
+            <a:pPr indent="0" marL="0">
+              <a:buNone/>
+            </a:pPr>
+            <a:r>
+              <a:rPr lang="en-US" sz="1150" b="1" spc="180" kern="0" dirty="0">
+                <a:solidFill>
+                  <a:srgbClr val="0F7C86"/>
+                </a:solidFill>
+                <a:latin typeface="Arial" pitchFamily="34" charset="0"/>
+                <a:ea typeface="Arial" pitchFamily="34" charset="-122"/>
+                <a:cs typeface="Arial" pitchFamily="34" charset="-120"/>
+              </a:rPr>
+              <a:t>DER LEBENSZYKLUS</a:t>
+            </a:r>
+            <a:endParaRPr lang="en-US" sz="1150" dirty="0"/>
+          </a:p>
+        </p:txBody>
+      </p:sp>
+      <p:sp>
+        <p:nvSpPr>
+          <p:cNvPr id="4" name="Text 2"/>
+          <p:cNvSpPr/>
+          <p:nvPr/>
+        </p:nvSpPr>
+        <p:spPr>
+          <a:xfrm>
+            <a:off x="566928" y="731520"/>
+            <a:ext cx="8010144" cy="603504"/>
+          </a:xfrm>
+          <a:prstGeom prst="rect">
+            <a:avLst/>
+          </a:prstGeom>
+          <a:noFill/>
+          <a:ln/>
+        </p:spPr>
+        <p:txBody>
+          <a:bodyPr wrap="square" lIns="0" tIns="0" rIns="0" bIns="0" rtlCol="0" anchor="t"/>
+          <a:lstStyle/>
+          <a:p>
+            <a:pPr indent="0" marL="0">
+              <a:buNone/>
+            </a:pPr>
+            <a:r>
+              <a:rPr lang="en-US" sz="2600" b="1" dirty="0">
+                <a:solidFill>
+                  <a:srgbClr val="272E52"/>
+                </a:solidFill>
+                <a:latin typeface="Arial" pitchFamily="34" charset="0"/>
+                <a:ea typeface="Arial" pitchFamily="34" charset="-122"/>
+                <a:cs typeface="Arial" pitchFamily="34" charset="-120"/>
+              </a:rPr>
+              <a:t>Ein Befehl hoch, ein Befehl runter</a:t>
+            </a:r>
+            <a:endParaRPr lang="en-US" sz="2600" dirty="0"/>
+          </a:p>
+        </p:txBody>
+      </p:sp>
+      <p:pic>
+        <p:nvPicPr>
+          <p:cNvPr id="5" name="Image 0" descr="/Users/jacobmenge/Desktop/kurs-26.2b-orga/folienwerkstatt/assets/diagramme/compose-leben.png">    </p:cNvPr>
+          <p:cNvPicPr>
+            <a:picLocks noChangeAspect="1"/>
+          </p:cNvPicPr>
+          <p:nvPr/>
+        </p:nvPicPr>
+        <p:blipFill>
+          <a:blip r:embed="rId1"/>
+          <a:stretch>
+            <a:fillRect/>
+          </a:stretch>
+        </p:blipFill>
+        <p:spPr>
+          <a:xfrm>
+            <a:off x="566928" y="1499616"/>
+            <a:ext cx="8010144" cy="2249424"/>
+          </a:xfrm>
+          <a:prstGeom prst="rect">
+            <a:avLst/>
+          </a:prstGeom>
+        </p:spPr>
+      </p:pic>
+      <p:sp>
+        <p:nvSpPr>
+          <p:cNvPr id="6" name="Shape 3"/>
+          <p:cNvSpPr/>
+          <p:nvPr/>
+        </p:nvSpPr>
+        <p:spPr>
+          <a:xfrm>
+            <a:off x="566928" y="4069080"/>
+            <a:ext cx="32004" cy="256032"/>
           </a:xfrm>
           <a:prstGeom prst="rect">
             <a:avLst/>
           </a:prstGeom>
           <a:solidFill>
-            <a:srgbClr val="9A6310"/>
+            <a:srgbClr val="0F7C86"/>
           </a:solidFill>
           <a:ln/>
         </p:spPr>
       </p:sp>
       <p:sp>
         <p:nvSpPr>
-          <p:cNvPr id="4" name="Text 2"/>
-          <p:cNvSpPr/>
-          <p:nvPr/>
-        </p:nvSpPr>
-        <p:spPr>
-          <a:xfrm>
-            <a:off x="6629400" y="1463040"/>
-            <a:ext cx="2194560" cy="1737360"/>
+          <p:cNvPr id="7" name="Text 4"/>
+          <p:cNvSpPr/>
+          <p:nvPr/>
+        </p:nvSpPr>
+        <p:spPr>
+          <a:xfrm>
+            <a:off x="749808" y="4023360"/>
+            <a:ext cx="7827264" cy="402336"/>
           </a:xfrm>
           <a:prstGeom prst="rect">
             <a:avLst/>
@@ -8671,109 +9071,73 @@
           <a:bodyPr wrap="square" lIns="0" tIns="0" rIns="0" bIns="0" rtlCol="0" anchor="ctr"/>
           <a:lstStyle/>
           <a:p>
-            <a:pPr algn="ctr" indent="0" marL="0">
-              <a:buNone/>
-            </a:pPr>
-            <a:r>
-              <a:rPr lang="en-US" sz="8400" b="1" dirty="0">
-                <a:solidFill>
-                  <a:srgbClr val="9A6310"/>
-                </a:solidFill>
-                <a:latin typeface="Arial" pitchFamily="34" charset="0"/>
-                <a:ea typeface="Arial" pitchFamily="34" charset="-122"/>
-                <a:cs typeface="Arial" pitchFamily="34" charset="-120"/>
-              </a:rPr>
-              <a:t>02</a:t>
-            </a:r>
-            <a:endParaRPr lang="en-US" sz="8400" dirty="0"/>
-          </a:p>
-        </p:txBody>
-      </p:sp>
-      <p:sp>
-        <p:nvSpPr>
-          <p:cNvPr id="5" name="Shape 3"/>
-          <p:cNvSpPr/>
-          <p:nvPr/>
-        </p:nvSpPr>
-        <p:spPr>
-          <a:xfrm>
-            <a:off x="566928" y="1883664"/>
-            <a:ext cx="475488" cy="50292"/>
-          </a:xfrm>
-          <a:prstGeom prst="rect">
-            <a:avLst/>
-          </a:prstGeom>
-          <a:solidFill>
-            <a:srgbClr val="9A6310"/>
-          </a:solidFill>
-          <a:ln/>
-        </p:spPr>
-      </p:sp>
-      <p:sp>
-        <p:nvSpPr>
-          <p:cNvPr id="6" name="Text 4"/>
-          <p:cNvSpPr/>
-          <p:nvPr/>
-        </p:nvSpPr>
-        <p:spPr>
-          <a:xfrm>
-            <a:off x="566928" y="2084832"/>
-            <a:ext cx="5394960" cy="868680"/>
-          </a:xfrm>
-          <a:prstGeom prst="rect">
-            <a:avLst/>
-          </a:prstGeom>
-          <a:noFill/>
-          <a:ln/>
-        </p:spPr>
-        <p:txBody>
-          <a:bodyPr wrap="square" lIns="0" tIns="0" rIns="0" bIns="0" rtlCol="0" anchor="t"/>
-          <a:lstStyle/>
-          <a:p>
-            <a:pPr indent="0" marL="0">
-              <a:buNone/>
-            </a:pPr>
-            <a:r>
-              <a:rPr lang="en-US" sz="3000" b="1" dirty="0">
-                <a:solidFill>
-                  <a:srgbClr val="272E52"/>
-                </a:solidFill>
-                <a:latin typeface="Arial" pitchFamily="34" charset="0"/>
-                <a:ea typeface="Arial" pitchFamily="34" charset="-122"/>
-                <a:cs typeface="Arial" pitchFamily="34" charset="-120"/>
-              </a:rPr>
-              <a:t>Der Stack aus einer Hand</a:t>
-            </a:r>
-            <a:endParaRPr lang="en-US" sz="3000" dirty="0"/>
-          </a:p>
-        </p:txBody>
-      </p:sp>
-      <p:sp>
-        <p:nvSpPr>
-          <p:cNvPr id="7" name="Text 5"/>
-          <p:cNvSpPr/>
-          <p:nvPr/>
-        </p:nvSpPr>
-        <p:spPr>
-          <a:xfrm>
-            <a:off x="566928" y="3017520"/>
-            <a:ext cx="5394960" cy="548640"/>
-          </a:xfrm>
-          <a:prstGeom prst="rect">
-            <a:avLst/>
-          </a:prstGeom>
-          <a:noFill/>
-          <a:ln/>
-        </p:spPr>
-        <p:txBody>
-          <a:bodyPr wrap="square" lIns="0" tIns="0" rIns="0" bIns="0" rtlCol="0" anchor="t"/>
-          <a:lstStyle/>
-          <a:p>
-            <a:pPr indent="0" marL="0">
-              <a:buNone/>
-            </a:pPr>
-            <a:r>
-              <a:rPr lang="en-US" sz="1350" dirty="0">
+            <a:pPr indent="0" marL="0">
+              <a:buNone/>
+            </a:pPr>
+            <a:r>
+              <a:rPr lang="en-US" sz="1200" b="1" dirty="0">
+                <a:solidFill>
+                  <a:srgbClr val="434A63"/>
+                </a:solidFill>
+                <a:latin typeface="Arial" pitchFamily="34" charset="0"/>
+                <a:ea typeface="Arial" pitchFamily="34" charset="-122"/>
+                <a:cs typeface="Arial" pitchFamily="34" charset="-120"/>
+              </a:rPr>
+              <a:t>Das -v von down -v ist die bewusste Entscheidung, auch die Daten zu löschen. Ohne -v überlebt euer Volume jeden down.</a:t>
+            </a:r>
+            <a:endParaRPr lang="en-US" sz="1200" dirty="0"/>
+          </a:p>
+        </p:txBody>
+      </p:sp>
+      <p:sp>
+        <p:nvSpPr>
+          <p:cNvPr id="8" name="Shape 5"/>
+          <p:cNvSpPr/>
+          <p:nvPr/>
+        </p:nvSpPr>
+        <p:spPr>
+          <a:xfrm>
+            <a:off x="566928" y="4631436"/>
+            <a:ext cx="8010144" cy="0"/>
+          </a:xfrm>
+          <a:prstGeom prst="line">
+            <a:avLst/>
+          </a:prstGeom>
+          <a:noFill/>
+          <a:ln w="9525">
+            <a:solidFill>
+              <a:srgbClr val="DFE3F0"/>
+            </a:solidFill>
+            <a:prstDash val="solid"/>
+          </a:ln>
+        </p:spPr>
+      </p:sp>
+      <p:sp>
+        <p:nvSpPr>
+          <p:cNvPr id="9" name="Text 6"/>
+          <p:cNvSpPr/>
+          <p:nvPr/>
+        </p:nvSpPr>
+        <p:spPr>
+          <a:xfrm>
+            <a:off x="566928" y="4722876"/>
+            <a:ext cx="5029200" cy="237744"/>
+          </a:xfrm>
+          <a:prstGeom prst="rect">
+            <a:avLst/>
+          </a:prstGeom>
+          <a:noFill/>
+          <a:ln/>
+        </p:spPr>
+        <p:txBody>
+          <a:bodyPr wrap="square" lIns="0" tIns="0" rIns="0" bIns="0" rtlCol="0" anchor="ctr"/>
+          <a:lstStyle/>
+          <a:p>
+            <a:pPr indent="0" marL="0">
+              <a:buNone/>
+            </a:pPr>
+            <a:r>
+              <a:rPr lang="en-US" sz="1050" spc="30" kern="0" dirty="0">
                 <a:solidFill>
                   <a:srgbClr val="5C6377"/>
                 </a:solidFill>
@@ -8781,9 +9145,48 @@
                 <a:ea typeface="Arial" pitchFamily="34" charset="-122"/>
                 <a:cs typeface="Arial" pitchFamily="34" charset="-120"/>
               </a:rPr>
-              <a:t>55 Minuten in Gruppen: die Montags-Übung als compose.yaml</a:t>
-            </a:r>
-            <a:endParaRPr lang="en-US" sz="1350" dirty="0"/>
+              <a:t>Die Idee</a:t>
+            </a:r>
+            <a:endParaRPr lang="en-US" sz="1050" dirty="0"/>
+          </a:p>
+        </p:txBody>
+      </p:sp>
+      <p:sp>
+        <p:nvSpPr>
+          <p:cNvPr id="10" name="Text 7"/>
+          <p:cNvSpPr/>
+          <p:nvPr/>
+        </p:nvSpPr>
+        <p:spPr>
+          <a:xfrm>
+            <a:off x="8028432" y="4722876"/>
+            <a:ext cx="548640" cy="237744"/>
+          </a:xfrm>
+          <a:prstGeom prst="rect">
+            <a:avLst/>
+          </a:prstGeom>
+          <a:noFill/>
+          <a:ln/>
+        </p:spPr>
+        <p:txBody>
+          <a:bodyPr wrap="square" lIns="0" tIns="0" rIns="0" bIns="0" rtlCol="0" anchor="ctr"/>
+          <a:lstStyle/>
+          <a:p>
+            <a:pPr algn="r" indent="0" marL="0">
+              <a:buNone/>
+            </a:pPr>
+            <a:r>
+              <a:rPr lang="en-US" sz="1050" dirty="0">
+                <a:solidFill>
+                  <a:srgbClr val="5C6377"/>
+                </a:solidFill>
+                <a:latin typeface="Arial" pitchFamily="34" charset="0"/>
+                <a:ea typeface="Arial" pitchFamily="34" charset="-122"/>
+                <a:cs typeface="Arial" pitchFamily="34" charset="-120"/>
+              </a:rPr>
+              <a:t>7/12</a:t>
+            </a:r>
+            <a:endParaRPr lang="en-US" sz="1050" dirty="0"/>
           </a:p>
         </p:txBody>
       </p:sp>

--- a/folien/07-docker-compose.pptx
+++ b/folien/07-docker-compose.pptx
@@ -2741,8 +2741,8 @@
         </p:nvSpPr>
         <p:spPr>
           <a:xfrm>
-            <a:off x="438912" y="1792224"/>
-            <a:ext cx="8266176" cy="329184"/>
+            <a:off x="438912" y="1737360"/>
+            <a:ext cx="8266176" cy="283464"/>
           </a:xfrm>
           <a:prstGeom prst="rect">
             <a:avLst/>
@@ -2761,8 +2761,8 @@
         </p:nvSpPr>
         <p:spPr>
           <a:xfrm>
-            <a:off x="566928" y="1792224"/>
-            <a:ext cx="914400" cy="329184"/>
+            <a:off x="566928" y="1737360"/>
+            <a:ext cx="914400" cy="283464"/>
           </a:xfrm>
           <a:prstGeom prst="rect">
             <a:avLst/>
@@ -2800,8 +2800,8 @@
         </p:nvSpPr>
         <p:spPr>
           <a:xfrm>
-            <a:off x="1481328" y="1792224"/>
-            <a:ext cx="7095744" cy="329184"/>
+            <a:off x="1481328" y="1737360"/>
+            <a:ext cx="7095744" cy="283464"/>
           </a:xfrm>
           <a:prstGeom prst="rect">
             <a:avLst/>
@@ -2839,8 +2839,8 @@
         </p:nvSpPr>
         <p:spPr>
           <a:xfrm>
-            <a:off x="566928" y="2121408"/>
-            <a:ext cx="914400" cy="329184"/>
+            <a:off x="566928" y="2020824"/>
+            <a:ext cx="914400" cy="283464"/>
           </a:xfrm>
           <a:prstGeom prst="rect">
             <a:avLst/>
@@ -2878,8 +2878,8 @@
         </p:nvSpPr>
         <p:spPr>
           <a:xfrm>
-            <a:off x="1481328" y="2121408"/>
-            <a:ext cx="7095744" cy="329184"/>
+            <a:off x="1481328" y="2020824"/>
+            <a:ext cx="7095744" cy="283464"/>
           </a:xfrm>
           <a:prstGeom prst="rect">
             <a:avLst/>
@@ -2917,8 +2917,8 @@
         </p:nvSpPr>
         <p:spPr>
           <a:xfrm>
-            <a:off x="438912" y="2450592"/>
-            <a:ext cx="8266176" cy="329184"/>
+            <a:off x="438912" y="2304288"/>
+            <a:ext cx="8266176" cy="283464"/>
           </a:xfrm>
           <a:prstGeom prst="rect">
             <a:avLst/>
@@ -2937,8 +2937,8 @@
         </p:nvSpPr>
         <p:spPr>
           <a:xfrm>
-            <a:off x="566928" y="2450592"/>
-            <a:ext cx="914400" cy="329184"/>
+            <a:off x="566928" y="2304288"/>
+            <a:ext cx="914400" cy="283464"/>
           </a:xfrm>
           <a:prstGeom prst="rect">
             <a:avLst/>
@@ -2976,8 +2976,8 @@
         </p:nvSpPr>
         <p:spPr>
           <a:xfrm>
-            <a:off x="1481328" y="2450592"/>
-            <a:ext cx="7095744" cy="329184"/>
+            <a:off x="1481328" y="2304288"/>
+            <a:ext cx="7095744" cy="283464"/>
           </a:xfrm>
           <a:prstGeom prst="rect">
             <a:avLst/>
@@ -3015,8 +3015,8 @@
         </p:nvSpPr>
         <p:spPr>
           <a:xfrm>
-            <a:off x="566928" y="2779776"/>
-            <a:ext cx="914400" cy="329184"/>
+            <a:off x="566928" y="2587752"/>
+            <a:ext cx="914400" cy="283464"/>
           </a:xfrm>
           <a:prstGeom prst="rect">
             <a:avLst/>
@@ -3054,8 +3054,8 @@
         </p:nvSpPr>
         <p:spPr>
           <a:xfrm>
-            <a:off x="1481328" y="2779776"/>
-            <a:ext cx="7095744" cy="329184"/>
+            <a:off x="1481328" y="2587752"/>
+            <a:ext cx="7095744" cy="283464"/>
           </a:xfrm>
           <a:prstGeom prst="rect">
             <a:avLst/>
@@ -3093,8 +3093,8 @@
         </p:nvSpPr>
         <p:spPr>
           <a:xfrm>
-            <a:off x="438912" y="3108960"/>
-            <a:ext cx="8266176" cy="329184"/>
+            <a:off x="438912" y="2871216"/>
+            <a:ext cx="8266176" cy="283464"/>
           </a:xfrm>
           <a:prstGeom prst="rect">
             <a:avLst/>
@@ -3113,8 +3113,8 @@
         </p:nvSpPr>
         <p:spPr>
           <a:xfrm>
-            <a:off x="566928" y="3108960"/>
-            <a:ext cx="914400" cy="329184"/>
+            <a:off x="566928" y="2871216"/>
+            <a:ext cx="914400" cy="283464"/>
           </a:xfrm>
           <a:prstGeom prst="rect">
             <a:avLst/>
@@ -3138,6 +3138,84 @@
                 <a:ea typeface="Courier New" pitchFamily="34" charset="-122"/>
                 <a:cs typeface="Courier New" pitchFamily="34" charset="-120"/>
               </a:rPr>
+              <a:t>Challenge</a:t>
+            </a:r>
+            <a:endParaRPr lang="en-US" sz="1100" dirty="0"/>
+          </a:p>
+        </p:txBody>
+      </p:sp>
+      <p:sp>
+        <p:nvSpPr>
+          <p:cNvPr id="17" name="Text 15"/>
+          <p:cNvSpPr/>
+          <p:nvPr/>
+        </p:nvSpPr>
+        <p:spPr>
+          <a:xfrm>
+            <a:off x="1481328" y="2871216"/>
+            <a:ext cx="7095744" cy="283464"/>
+          </a:xfrm>
+          <a:prstGeom prst="rect">
+            <a:avLst/>
+          </a:prstGeom>
+          <a:noFill/>
+          <a:ln/>
+        </p:spPr>
+        <p:txBody>
+          <a:bodyPr wrap="square" lIns="0" tIns="0" rIns="0" bIns="0" rtlCol="0" anchor="ctr"/>
+          <a:lstStyle/>
+          <a:p>
+            <a:pPr indent="0" marL="0">
+              <a:buNone/>
+            </a:pPr>
+            <a:r>
+              <a:rPr lang="en-US" sz="1100" dirty="0">
+                <a:solidFill>
+                  <a:srgbClr val="434A63"/>
+                </a:solidFill>
+                <a:latin typeface="Arial" pitchFamily="34" charset="0"/>
+                <a:ea typeface="Arial" pitchFamily="34" charset="-122"/>
+                <a:cs typeface="Arial" pitchFamily="34" charset="-120"/>
+              </a:rPr>
+              <a:t>Der zweite Stack: ohne Anleitung bauen, Hinweise nur zum Aufklappen</a:t>
+            </a:r>
+            <a:endParaRPr lang="en-US" sz="1100" dirty="0"/>
+          </a:p>
+        </p:txBody>
+      </p:sp>
+      <p:sp>
+        <p:nvSpPr>
+          <p:cNvPr id="18" name="Text 16"/>
+          <p:cNvSpPr/>
+          <p:nvPr/>
+        </p:nvSpPr>
+        <p:spPr>
+          <a:xfrm>
+            <a:off x="566928" y="3154680"/>
+            <a:ext cx="914400" cy="283464"/>
+          </a:xfrm>
+          <a:prstGeom prst="rect">
+            <a:avLst/>
+          </a:prstGeom>
+          <a:noFill/>
+          <a:ln/>
+        </p:spPr>
+        <p:txBody>
+          <a:bodyPr wrap="square" lIns="0" tIns="0" rIns="0" bIns="0" rtlCol="0" anchor="ctr"/>
+          <a:lstStyle/>
+          <a:p>
+            <a:pPr indent="0" marL="0">
+              <a:buNone/>
+            </a:pPr>
+            <a:r>
+              <a:rPr lang="en-US" sz="1100" b="1" dirty="0">
+                <a:solidFill>
+                  <a:srgbClr val="9A6310"/>
+                </a:solidFill>
+                <a:latin typeface="Courier New" pitchFamily="34" charset="0"/>
+                <a:ea typeface="Courier New" pitchFamily="34" charset="-122"/>
+                <a:cs typeface="Courier New" pitchFamily="34" charset="-120"/>
+              </a:rPr>
               <a:t>Notieren</a:t>
             </a:r>
             <a:endParaRPr lang="en-US" sz="1100" dirty="0"/>
@@ -3146,14 +3224,14 @@
       </p:sp>
       <p:sp>
         <p:nvSpPr>
-          <p:cNvPr id="17" name="Text 15"/>
-          <p:cNvSpPr/>
-          <p:nvPr/>
-        </p:nvSpPr>
-        <p:spPr>
-          <a:xfrm>
-            <a:off x="1481328" y="3108960"/>
-            <a:ext cx="7095744" cy="329184"/>
+          <p:cNvPr id="19" name="Text 17"/>
+          <p:cNvSpPr/>
+          <p:nvPr/>
+        </p:nvSpPr>
+        <p:spPr>
+          <a:xfrm>
+            <a:off x="1481328" y="3154680"/>
+            <a:ext cx="7095744" cy="283464"/>
           </a:xfrm>
           <a:prstGeom prst="rect">
             <a:avLst/>
@@ -3185,7 +3263,7 @@
       </p:sp>
       <p:sp>
         <p:nvSpPr>
-          <p:cNvPr id="18" name="Shape 16"/>
+          <p:cNvPr id="20" name="Shape 18"/>
           <p:cNvSpPr/>
           <p:nvPr/>
         </p:nvSpPr>
@@ -3205,7 +3283,7 @@
       </p:sp>
       <p:sp>
         <p:nvSpPr>
-          <p:cNvPr id="19" name="Shape 17"/>
+          <p:cNvPr id="21" name="Shape 19"/>
           <p:cNvSpPr/>
           <p:nvPr/>
         </p:nvSpPr>
@@ -3225,7 +3303,7 @@
       </p:sp>
       <p:sp>
         <p:nvSpPr>
-          <p:cNvPr id="20" name="Text 18"/>
+          <p:cNvPr id="22" name="Text 20"/>
           <p:cNvSpPr/>
           <p:nvPr/>
         </p:nvSpPr>
@@ -3264,7 +3342,7 @@
       </p:sp>
       <p:sp>
         <p:nvSpPr>
-          <p:cNvPr id="21" name="Text 19"/>
+          <p:cNvPr id="23" name="Text 21"/>
           <p:cNvSpPr/>
           <p:nvPr/>
         </p:nvSpPr>
@@ -3355,7 +3433,7 @@
       </p:sp>
       <p:sp>
         <p:nvSpPr>
-          <p:cNvPr id="22" name="Shape 20"/>
+          <p:cNvPr id="24" name="Shape 22"/>
           <p:cNvSpPr/>
           <p:nvPr/>
         </p:nvSpPr>
@@ -3378,7 +3456,7 @@
       </p:sp>
       <p:sp>
         <p:nvSpPr>
-          <p:cNvPr id="23" name="Text 21"/>
+          <p:cNvPr id="25" name="Text 23"/>
           <p:cNvSpPr/>
           <p:nvPr/>
         </p:nvSpPr>
@@ -3417,7 +3495,7 @@
       </p:sp>
       <p:sp>
         <p:nvSpPr>
-          <p:cNvPr id="24" name="Text 22"/>
+          <p:cNvPr id="26" name="Text 24"/>
           <p:cNvSpPr/>
           <p:nvPr/>
         </p:nvSpPr>
@@ -5301,7 +5379,7 @@
                 <a:ea typeface="Arial" pitchFamily="34" charset="-122"/>
                 <a:cs typeface="Arial" pitchFamily="34" charset="-120"/>
               </a:rPr>
-              <a:t>Als DevOps-Team der Bodenstation bringt ihr einen Stack aus vier Diensten zurück ins Leben.</a:t>
+              <a:t>Als DevOps-Team der Bodenkontrolle bringt ihr die Aurora Station mit zehn Containern zurück ins Leben.</a:t>
             </a:r>
             <a:endParaRPr lang="en-US" sz="1150" dirty="0"/>
           </a:p>
@@ -7557,8 +7635,8 @@
         </p:blipFill>
         <p:spPr>
           <a:xfrm>
-            <a:off x="566928" y="1517904"/>
-            <a:ext cx="8010144" cy="2286000"/>
+            <a:off x="566928" y="1463040"/>
+            <a:ext cx="8010144" cy="2487168"/>
           </a:xfrm>
           <a:prstGeom prst="rect">
             <a:avLst/>

--- a/folien/07-docker-compose.pptx
+++ b/folien/07-docker-compose.pptx
@@ -4988,7 +4988,7 @@
                 <a:ea typeface="Arial" pitchFamily="34" charset="-122"/>
                 <a:cs typeface="Arial" pitchFamily="34" charset="-120"/>
               </a:rPr>
-              <a:t>Merksatz des Abends: Die Datei ist der Stack. Wer die compose.yaml hat, hat die ganze Umgebung.</a:t>
+              <a:t>Das Prinzip heißt deklarativ: Ihr beschreibt den Soll-Zustand, Compose stellt ihn her. Für Server und Netze heißt dieselbe Idee Infrastructure as Code.</a:t>
             </a:r>
             <a:endParaRPr lang="en-US" sz="1200" dirty="0"/>
           </a:p>
